--- a/library/seminars/sem-05/rendered/sem-05-n.pptx
+++ b/library/seminars/sem-05/rendered/sem-05-n.pptx
@@ -2002,7 +2002,7 @@
           <a:p/>
           <a:p>
             <a:r>
-              <a:t>Первая таблица — цена одного срабатывания, измерено на настоящем проекте, с теми проверками, которые в нём реально лежат. Наш барьер ветки — двадцать семь миллисекунд. Синтаксическая проверка — сто двадцать четыре. Сборка — тысяча сто тридцать семь, больше секунды.</a:t>
+              <a:t>Первая таблица — цена одного срабатывания, измерено на настоящем проекте, с теми проверками, которые в нём реально лежат. Наш барьер ветки — двадцать семь миллисекунд. Сборка — тысяча сто тридцать семь, больше секунды. Между ними, на слайде её нет, синтаксическая проверка — сто двадцать четыре миллисекунды.</a:t>
             </a:r>
           </a:p>
           <a:p/>
@@ -2014,19 +2014,19 @@
           <a:p/>
           <a:p>
             <a:r>
-              <a:t>Вторая таблица: что из этого выходит. Десять правок — двенадцать секунд, двадцать — двадцать шесть, сорок — пятьдесят одна. Это измерено от начала до конца, не пересчитано из первой таблицы.</a:t>
+              <a:t>Вторая таблица: что из этого выходит. Первая строка измерена от начала до конца, не пересчитана из первой таблицы: двадцать правок — двадцать шесть секунд, сорок — пятьдесят одна. Для десяти, если спросят, двенадцать секунд.</a:t>
             </a:r>
           </a:p>
           <a:p/>
           <a:p>
             <a:r>
-              <a:t>И тут же оговорка, которая делает цифру честной: это самый дешёвый случай, какой можно придумать. Три файла, сборка чуть больше секунды. На вашем проекте будет больше, не меньше.</a:t>
+              <a:t>И тут же оговорка, которая делает цифру честной — её на слайде нет, проговорите вслух: это самый дешёвый случай, какой можно придумать. Три файла, сборка чуть больше секунды. На вашем проекте будет больше, не меньше.</a:t>
             </a:r>
           </a:p>
           <a:p/>
           <a:p>
             <a:r>
-              <a:t>Третья таблица — рост. Первая строка измерена, она выделена. Три остальные — арифметика от неё, и так и подписаны. Добавьте прогон тестов — минуты. Настоящий прогон на минуту — двадцать и сорок минут. И два хука вместо одного, что бывает сплошь — восемьдесят минут на сорока правках.</a:t>
+              <a:t>Третья таблица — рост. Первая строка измерена, она выделена. Три остальные — арифметика от неё, и так и подписаны. Настоящий прогон тестов на минуту — двадцать и сорок минут. И два хука вместо одного, что бывает сплошь — восемьдесят минут на сорока правках.</a:t>
             </a:r>
           </a:p>
           <a:p/>
@@ -6765,8 +6765,8 @@
         </p:blipFill>
         <p:spPr>
           <a:xfrm>
-            <a:off x="3187000" y="1254252"/>
-            <a:ext cx="5814950" cy="1696027"/>
+            <a:off x="2014758" y="1254252"/>
+            <a:ext cx="8159435" cy="1720281"/>
           </a:xfrm>
           <a:prstGeom prst="rect">
             <a:avLst/>
@@ -6781,8 +6781,8 @@
         </p:nvSpPr>
         <p:spPr>
           <a:xfrm>
-            <a:off x="502920" y="3114871"/>
-            <a:ext cx="82296" cy="511126"/>
+            <a:off x="502920" y="3139125"/>
+            <a:ext cx="82296" cy="544851"/>
           </a:xfrm>
           <a:prstGeom prst="roundRect">
             <a:avLst>
@@ -6827,8 +6827,8 @@
         </p:nvSpPr>
         <p:spPr>
           <a:xfrm>
-            <a:off x="859536" y="3242887"/>
-            <a:ext cx="10643616" cy="255094"/>
+            <a:off x="859536" y="3267141"/>
+            <a:ext cx="10643616" cy="288819"/>
           </a:xfrm>
           <a:prstGeom prst="rect">
             <a:avLst/>
@@ -6883,7 +6883,7 @@
                 </a:solidFill>
                 <a:latin typeface="Arial"/>
               </a:rPr>
-              <a:t> проверок пройдено, </a:t>
+              <a:t> пройдено, </a:t>
             </a:r>
             <a:r>
               <a:rPr sz="1100" b="1" i="0">
@@ -6901,133 +6901,7 @@
                 </a:solidFill>
                 <a:latin typeface="Arial"/>
               </a:rPr>
-              <a:t> провалов. И тот же скрипт добровольно печатает </a:t>
-            </a:r>
-            <a:r>
-              <a:rPr sz="1100" b="1" i="0">
-                <a:solidFill>
-                  <a:srgbClr val="141B2E"/>
-                </a:solidFill>
-                <a:latin typeface="Arial"/>
-              </a:rPr>
-              <a:t>5 форм, на которых барьер молчит</a:t>
-            </a:r>
-            <a:r>
-              <a:rPr sz="1100" b="1" i="0">
-                <a:solidFill>
-                  <a:srgbClr val="141B2E"/>
-                </a:solidFill>
-                <a:latin typeface="Arial"/>
-              </a:rPr>
-              <a:t>: </a:t>
-            </a:r>
-            <a:r>
-              <a:rPr sz="1100" b="1" i="0">
-                <a:solidFill>
-                  <a:srgbClr val="141B2E"/>
-                </a:solidFill>
-                <a:latin typeface="Consolas"/>
-              </a:rPr>
-              <a:t>trunk</a:t>
-            </a:r>
-            <a:r>
-              <a:rPr sz="1100" b="1" i="0">
-                <a:solidFill>
-                  <a:srgbClr val="141B2E"/>
-                </a:solidFill>
-                <a:latin typeface="Arial"/>
-              </a:rPr>
-              <a:t> вместо </a:t>
-            </a:r>
-            <a:r>
-              <a:rPr sz="1100" b="1" i="0">
-                <a:solidFill>
-                  <a:srgbClr val="141B2E"/>
-                </a:solidFill>
-                <a:latin typeface="Consolas"/>
-              </a:rPr>
-              <a:t>main</a:t>
-            </a:r>
-            <a:r>
-              <a:rPr sz="1100" b="1" i="0">
-                <a:solidFill>
-                  <a:srgbClr val="141B2E"/>
-                </a:solidFill>
-                <a:latin typeface="Arial"/>
-              </a:rPr>
-              <a:t>/</a:t>
-            </a:r>
-            <a:r>
-              <a:rPr sz="1100" b="1" i="0">
-                <a:solidFill>
-                  <a:srgbClr val="141B2E"/>
-                </a:solidFill>
-                <a:latin typeface="Consolas"/>
-              </a:rPr>
-              <a:t>master</a:t>
-            </a:r>
-            <a:r>
-              <a:rPr sz="1100" b="1" i="0">
-                <a:solidFill>
-                  <a:srgbClr val="141B2E"/>
-                </a:solidFill>
-                <a:latin typeface="Arial"/>
-              </a:rPr>
-              <a:t> · </a:t>
-            </a:r>
-            <a:r>
-              <a:rPr sz="1100" b="1" i="0">
-                <a:solidFill>
-                  <a:srgbClr val="141B2E"/>
-                </a:solidFill>
-                <a:latin typeface="Consolas"/>
-              </a:rPr>
-              <a:t>git -C</a:t>
-            </a:r>
-            <a:r>
-              <a:rPr sz="1100" b="1" i="0">
-                <a:solidFill>
-                  <a:srgbClr val="141B2E"/>
-                </a:solidFill>
-                <a:latin typeface="Arial"/>
-              </a:rPr>
-              <a:t> · </a:t>
-            </a:r>
-            <a:r>
-              <a:rPr sz="1100" b="1" i="0">
-                <a:solidFill>
-                  <a:srgbClr val="141B2E"/>
-                </a:solidFill>
-                <a:latin typeface="Consolas"/>
-              </a:rPr>
-              <a:t>/usr/bin/git</a:t>
-            </a:r>
-            <a:r>
-              <a:rPr sz="1100" b="1" i="0">
-                <a:solidFill>
-                  <a:srgbClr val="141B2E"/>
-                </a:solidFill>
-                <a:latin typeface="Arial"/>
-              </a:rPr>
-              <a:t> · </a:t>
-            </a:r>
-            <a:r>
-              <a:rPr sz="1100" b="1" i="0">
-                <a:solidFill>
-                  <a:srgbClr val="141B2E"/>
-                </a:solidFill>
-                <a:latin typeface="Consolas"/>
-              </a:rPr>
-              <a:t>env git</a:t>
-            </a:r>
-            <a:r>
-              <a:rPr sz="1100" b="1" i="0">
-                <a:solidFill>
-                  <a:srgbClr val="141B2E"/>
-                </a:solidFill>
-                <a:latin typeface="Arial"/>
-              </a:rPr>
-              <a:t> · коммит на второй строке.</a:t>
+              <a:t> провалов — и тот же скрипт печатает пять форм, где барьер молчит.</a:t>
             </a:r>
           </a:p>
         </p:txBody>
@@ -7040,8 +6914,8 @@
         </p:nvSpPr>
         <p:spPr>
           <a:xfrm>
-            <a:off x="502920" y="3790589"/>
-            <a:ext cx="82296" cy="457200"/>
+            <a:off x="502920" y="3848569"/>
+            <a:ext cx="82296" cy="463295"/>
           </a:xfrm>
           <a:prstGeom prst="roundRect">
             <a:avLst>
@@ -7086,8 +6960,8 @@
         </p:nvSpPr>
         <p:spPr>
           <a:xfrm>
-            <a:off x="859536" y="3918605"/>
-            <a:ext cx="10643616" cy="201167"/>
+            <a:off x="859536" y="3976585"/>
+            <a:ext cx="10643616" cy="207263"/>
           </a:xfrm>
           <a:prstGeom prst="rect">
             <a:avLst/>
@@ -7109,49 +6983,40 @@
               </a:spcAft>
             </a:pPr>
             <a:r>
-              <a:rPr sz="1100" b="1" i="0">
-                <a:solidFill>
-                  <a:srgbClr val="141B2E"/>
-                </a:solidFill>
-                <a:latin typeface="Arial"/>
-              </a:rPr>
-              <a:t>База сравнения: из </a:t>
-            </a:r>
-            <a:r>
-              <a:rPr sz="1100" b="1" i="0">
-                <a:solidFill>
-                  <a:srgbClr val="141B2E"/>
-                </a:solidFill>
-                <a:latin typeface="Arial"/>
-              </a:rPr>
-              <a:t>шести</a:t>
-            </a:r>
-            <a:r>
-              <a:rPr sz="1100" b="1" i="0">
-                <a:solidFill>
-                  <a:srgbClr val="141B2E"/>
-                </a:solidFill>
-                <a:latin typeface="Arial"/>
-              </a:rPr>
-              <a:t> форм одной и той же команды барьер отклонил </a:t>
-            </a:r>
-            <a:r>
-              <a:rPr sz="1100" b="1" i="0">
-                <a:solidFill>
-                  <a:srgbClr val="141B2E"/>
-                </a:solidFill>
-                <a:latin typeface="Arial"/>
-              </a:rPr>
-              <a:t>одну</a:t>
-            </a:r>
-            <a:r>
-              <a:rPr sz="1100" b="1" i="0">
-                <a:solidFill>
-                  <a:srgbClr val="141B2E"/>
-                </a:solidFill>
-                <a:latin typeface="Arial"/>
-              </a:rPr>
-              <a:t>. Четыре из этих пяти форм независимо нашёл внешний тест против того же кода.</a:t>
+              <a:rPr sz="1200" b="1" i="0">
+                <a:solidFill>
+                  <a:srgbClr val="141B2E"/>
+                </a:solidFill>
+                <a:latin typeface="Arial"/>
+              </a:rPr>
+              <a:t>А этот хук не запускался ни разу</a:t>
+            </a:r>
+            <a:r>
+              <a:rPr sz="1200" b="1" i="0">
+                <a:solidFill>
+                  <a:srgbClr val="141B2E"/>
+                </a:solidFill>
+                <a:latin typeface="Arial"/>
+              </a:rPr>
+              <a:t> — в репозитории </a:t>
+            </a:r>
+            <a:r>
+              <a:rPr sz="1200" b="1" i="0">
+                <a:solidFill>
+                  <a:srgbClr val="141B2E"/>
+                </a:solidFill>
+                <a:latin typeface="Arial"/>
+              </a:rPr>
+              <a:t>этого курса</a:t>
+            </a:r>
+            <a:r>
+              <a:rPr sz="1200" b="1" i="0">
+                <a:solidFill>
+                  <a:srgbClr val="141B2E"/>
+                </a:solidFill>
+                <a:latin typeface="Arial"/>
+              </a:rPr>
+              <a:t>, 830 байт, исполняемый бит стоит. Три независимые причины:</a:t>
             </a:r>
           </a:p>
         </p:txBody>
@@ -7164,145 +7029,12 @@
         </p:nvSpPr>
         <p:spPr>
           <a:xfrm>
-            <a:off x="502920" y="4412381"/>
-            <a:ext cx="82296" cy="457200"/>
+            <a:off x="502920" y="4476457"/>
+            <a:ext cx="11183112" cy="1228852"/>
           </a:xfrm>
           <a:prstGeom prst="roundRect">
             <a:avLst>
-              <a:gd name="adj" fmla="val 50000"/>
-            </a:avLst>
-          </a:prstGeom>
-          <a:solidFill>
-            <a:srgbClr val="F0AB00"/>
-          </a:solidFill>
-          <a:ln>
-            <a:noFill/>
-          </a:ln>
-          <a:effectLst/>
-        </p:spPr>
-        <p:style>
-          <a:lnRef idx="1">
-            <a:schemeClr val="accent1"/>
-          </a:lnRef>
-          <a:fillRef idx="3">
-            <a:schemeClr val="accent1"/>
-          </a:fillRef>
-          <a:effectRef idx="2">
-            <a:schemeClr val="accent1"/>
-          </a:effectRef>
-          <a:fontRef idx="minor">
-            <a:schemeClr val="lt1"/>
-          </a:fontRef>
-        </p:style>
-        <p:txBody>
-          <a:bodyPr rtlCol="0" anchor="ctr"/>
-          <a:lstStyle/>
-          <a:p>
-            <a:pPr algn="ctr"/>
-          </a:p>
-        </p:txBody>
-      </p:sp>
-      <p:sp>
-        <p:nvSpPr>
-          <p:cNvPr id="10" name="TextBox 9"/>
-          <p:cNvSpPr txBox="1"/>
-          <p:nvPr/>
-        </p:nvSpPr>
-        <p:spPr>
-          <a:xfrm>
-            <a:off x="859536" y="4540397"/>
-            <a:ext cx="10643616" cy="201167"/>
-          </a:xfrm>
-          <a:prstGeom prst="rect">
-            <a:avLst/>
-          </a:prstGeom>
-          <a:noFill/>
-        </p:spPr>
-        <p:txBody>
-          <a:bodyPr wrap="square" lIns="0" rIns="0" tIns="0" bIns="0" anchor="ctr">
-            <a:spAutoFit/>
-          </a:bodyPr>
-          <a:lstStyle/>
-          <a:p>
-            <a:pPr algn="l">
-              <a:lnSpc>
-                <a:spcPct val="124000"/>
-              </a:lnSpc>
-              <a:spcAft>
-                <a:spcPts val="300"/>
-              </a:spcAft>
-            </a:pPr>
-            <a:r>
-              <a:rPr sz="1100" b="1" i="0">
-                <a:solidFill>
-                  <a:srgbClr val="141B2E"/>
-                </a:solidFill>
-                <a:latin typeface="Arial"/>
-              </a:rPr>
-              <a:t>А этот хук не запускался ни разу.</a:t>
-            </a:r>
-            <a:r>
-              <a:rPr sz="1100" b="1" i="0">
-                <a:solidFill>
-                  <a:srgbClr val="141B2E"/>
-                </a:solidFill>
-                <a:latin typeface="Arial"/>
-              </a:rPr>
-              <a:t> </a:t>
-            </a:r>
-            <a:r>
-              <a:rPr sz="1100" b="1" i="0">
-                <a:solidFill>
-                  <a:srgbClr val="141B2E"/>
-                </a:solidFill>
-                <a:latin typeface="Consolas"/>
-              </a:rPr>
-              <a:t>.claude/hooks/pre-commit-viz.sh</a:t>
-            </a:r>
-            <a:r>
-              <a:rPr sz="1100" b="1" i="0">
-                <a:solidFill>
-                  <a:srgbClr val="141B2E"/>
-                </a:solidFill>
-                <a:latin typeface="Arial"/>
-              </a:rPr>
-              <a:t> в репозитории </a:t>
-            </a:r>
-            <a:r>
-              <a:rPr sz="1100" b="1" i="0">
-                <a:solidFill>
-                  <a:srgbClr val="141B2E"/>
-                </a:solidFill>
-                <a:latin typeface="Arial"/>
-              </a:rPr>
-              <a:t>этого курса</a:t>
-            </a:r>
-            <a:r>
-              <a:rPr sz="1100" b="1" i="0">
-                <a:solidFill>
-                  <a:srgbClr val="141B2E"/>
-                </a:solidFill>
-                <a:latin typeface="Arial"/>
-              </a:rPr>
-              <a:t>: 830 байт, исполняемый бит стоит. Три независимые причины:</a:t>
-            </a:r>
-          </a:p>
-        </p:txBody>
-      </p:sp>
-      <p:sp>
-        <p:nvSpPr>
-          <p:cNvPr id="11" name="Rounded Rectangle 10"/>
-          <p:cNvSpPr/>
-          <p:nvPr/>
-        </p:nvSpPr>
-        <p:spPr>
-          <a:xfrm>
-            <a:off x="502920" y="5034173"/>
-            <a:ext cx="11183112" cy="1213866"/>
-          </a:xfrm>
-          <a:prstGeom prst="roundRect">
-            <a:avLst>
-              <a:gd name="adj" fmla="val 25000"/>
+              <a:gd name="adj" fmla="val 24803"/>
             </a:avLst>
           </a:prstGeom>
           <a:solidFill>
@@ -7339,42 +7071,144 @@
       </p:sp>
       <p:sp>
         <p:nvSpPr>
+          <p:cNvPr id="10" name="TextBox 9"/>
+          <p:cNvSpPr txBox="1"/>
+          <p:nvPr/>
+        </p:nvSpPr>
+        <p:spPr>
+          <a:xfrm>
+            <a:off x="630936" y="4604473"/>
+            <a:ext cx="4991327" cy="259587"/>
+          </a:xfrm>
+          <a:prstGeom prst="rect">
+            <a:avLst/>
+          </a:prstGeom>
+          <a:noFill/>
+        </p:spPr>
+        <p:txBody>
+          <a:bodyPr wrap="square" lIns="0" rIns="0" tIns="0" bIns="0" anchor="t">
+            <a:spAutoFit/>
+          </a:bodyPr>
+          <a:lstStyle/>
+          <a:p>
+            <a:pPr algn="l">
+              <a:lnSpc>
+                <a:spcPct val="110000"/>
+              </a:lnSpc>
+              <a:spcAft>
+                <a:spcPts val="0"/>
+              </a:spcAft>
+            </a:pPr>
+            <a:r>
+              <a:rPr sz="1000" b="1" i="0">
+                <a:solidFill>
+                  <a:srgbClr val="6B7685"/>
+                </a:solidFill>
+                <a:latin typeface="Arial"/>
+              </a:rPr>
+              <a:t>ПРИЧИНА</a:t>
+            </a:r>
+          </a:p>
+        </p:txBody>
+      </p:sp>
+      <p:sp>
+        <p:nvSpPr>
+          <p:cNvPr id="11" name="TextBox 10"/>
+          <p:cNvSpPr txBox="1"/>
+          <p:nvPr/>
+        </p:nvSpPr>
+        <p:spPr>
+          <a:xfrm>
+            <a:off x="5768567" y="4604473"/>
+            <a:ext cx="5643144" cy="259587"/>
+          </a:xfrm>
+          <a:prstGeom prst="rect">
+            <a:avLst/>
+          </a:prstGeom>
+          <a:noFill/>
+        </p:spPr>
+        <p:txBody>
+          <a:bodyPr wrap="square" lIns="0" rIns="0" tIns="0" bIns="0" anchor="t">
+            <a:spAutoFit/>
+          </a:bodyPr>
+          <a:lstStyle/>
+          <a:p>
+            <a:pPr algn="l">
+              <a:lnSpc>
+                <a:spcPct val="110000"/>
+              </a:lnSpc>
+              <a:spcAft>
+                <a:spcPts val="0"/>
+              </a:spcAft>
+            </a:pPr>
+            <a:r>
+              <a:rPr sz="1000" b="1" i="0">
+                <a:solidFill>
+                  <a:srgbClr val="6B7685"/>
+                </a:solidFill>
+                <a:latin typeface="Arial"/>
+              </a:rPr>
+              <a:t>ЧЕМ ПРОВЕРЯЕТСЯ</a:t>
+            </a:r>
+          </a:p>
+        </p:txBody>
+      </p:sp>
+      <p:sp>
+        <p:nvSpPr>
           <p:cNvPr id="12" name="TextBox 11"/>
           <p:cNvSpPr txBox="1"/>
           <p:nvPr/>
         </p:nvSpPr>
         <p:spPr>
           <a:xfrm>
-            <a:off x="630936" y="5162189"/>
-            <a:ext cx="6172005" cy="244601"/>
-          </a:xfrm>
-          <a:prstGeom prst="rect">
-            <a:avLst/>
-          </a:prstGeom>
-          <a:noFill/>
-        </p:spPr>
-        <p:txBody>
-          <a:bodyPr wrap="square" lIns="0" rIns="0" tIns="0" bIns="0" anchor="t">
-            <a:spAutoFit/>
-          </a:bodyPr>
-          <a:lstStyle/>
-          <a:p>
-            <a:pPr algn="l">
-              <a:lnSpc>
-                <a:spcPct val="110000"/>
-              </a:lnSpc>
-              <a:spcAft>
-                <a:spcPts val="0"/>
-              </a:spcAft>
-            </a:pPr>
-            <a:r>
-              <a:rPr sz="900" b="1" i="0">
-                <a:solidFill>
-                  <a:srgbClr val="6B7685"/>
-                </a:solidFill>
-                <a:latin typeface="Arial"/>
-              </a:rPr>
-              <a:t>ПРИЧИНА</a:t>
+            <a:off x="630936" y="4864061"/>
+            <a:ext cx="4991327" cy="237744"/>
+          </a:xfrm>
+          <a:prstGeom prst="rect">
+            <a:avLst/>
+          </a:prstGeom>
+          <a:noFill/>
+        </p:spPr>
+        <p:txBody>
+          <a:bodyPr wrap="square" lIns="0" rIns="0" tIns="0" bIns="0" anchor="ctr">
+            <a:spAutoFit/>
+          </a:bodyPr>
+          <a:lstStyle/>
+          <a:p>
+            <a:pPr algn="l">
+              <a:lnSpc>
+                <a:spcPct val="104000"/>
+              </a:lnSpc>
+              <a:spcAft>
+                <a:spcPts val="0"/>
+              </a:spcAft>
+            </a:pPr>
+            <a:r>
+              <a:rPr sz="1000" b="0" i="0">
+                <a:solidFill>
+                  <a:srgbClr val="141B2E"/>
+                </a:solidFill>
+                <a:latin typeface="Arial"/>
+              </a:rPr>
+              <a:t>это </a:t>
+            </a:r>
+            <a:r>
+              <a:rPr sz="1000" b="0" i="0">
+                <a:solidFill>
+                  <a:srgbClr val="141B2E"/>
+                </a:solidFill>
+                <a:latin typeface="Consolas"/>
+              </a:rPr>
+              <a:t>git</a:t>
+            </a:r>
+            <a:r>
+              <a:rPr sz="1000" b="0" i="0">
+                <a:solidFill>
+                  <a:srgbClr val="141B2E"/>
+                </a:solidFill>
+                <a:latin typeface="Arial"/>
+              </a:rPr>
+              <a:t>-хук, а не хук среды</a:t>
             </a:r>
           </a:p>
         </p:txBody>
@@ -7387,50 +7221,8 @@
         </p:nvSpPr>
         <p:spPr>
           <a:xfrm>
-            <a:off x="6949245" y="5162189"/>
-            <a:ext cx="4462466" cy="244601"/>
-          </a:xfrm>
-          <a:prstGeom prst="rect">
-            <a:avLst/>
-          </a:prstGeom>
-          <a:noFill/>
-        </p:spPr>
-        <p:txBody>
-          <a:bodyPr wrap="square" lIns="0" rIns="0" tIns="0" bIns="0" anchor="t">
-            <a:spAutoFit/>
-          </a:bodyPr>
-          <a:lstStyle/>
-          <a:p>
-            <a:pPr algn="l">
-              <a:lnSpc>
-                <a:spcPct val="110000"/>
-              </a:lnSpc>
-              <a:spcAft>
-                <a:spcPts val="0"/>
-              </a:spcAft>
-            </a:pPr>
-            <a:r>
-              <a:rPr sz="900" b="1" i="0">
-                <a:solidFill>
-                  <a:srgbClr val="6B7685"/>
-                </a:solidFill>
-                <a:latin typeface="Arial"/>
-              </a:rPr>
-              <a:t>ЧЕМ ПРОВЕРЯЕТСЯ</a:t>
-            </a:r>
-          </a:p>
-        </p:txBody>
-      </p:sp>
-      <p:sp>
-        <p:nvSpPr>
-          <p:cNvPr id="14" name="TextBox 13"/>
-          <p:cNvSpPr txBox="1"/>
-          <p:nvPr/>
-        </p:nvSpPr>
-        <p:spPr>
-          <a:xfrm>
-            <a:off x="630936" y="5406791"/>
-            <a:ext cx="6172005" cy="237744"/>
+            <a:off x="5768567" y="4864061"/>
+            <a:ext cx="5643144" cy="237744"/>
           </a:xfrm>
           <a:prstGeom prst="rect">
             <a:avLst/>
@@ -7452,85 +7244,16 @@
               </a:spcAft>
             </a:pPr>
             <a:r>
-              <a:rPr sz="900" b="0" i="0">
-                <a:solidFill>
-                  <a:srgbClr val="141B2E"/>
-                </a:solidFill>
-                <a:latin typeface="Arial"/>
-              </a:rPr>
-              <a:t>это </a:t>
-            </a:r>
-            <a:r>
-              <a:rPr sz="900" b="0" i="0">
+              <a:rPr sz="1000" b="0" i="0">
                 <a:solidFill>
                   <a:srgbClr val="141B2E"/>
                 </a:solidFill>
                 <a:latin typeface="Consolas"/>
               </a:rPr>
-              <a:t>git</a:t>
-            </a:r>
-            <a:r>
-              <a:rPr sz="900" b="0" i="0">
-                <a:solidFill>
-                  <a:srgbClr val="141B2E"/>
-                </a:solidFill>
-                <a:latin typeface="Arial"/>
-              </a:rPr>
-              <a:t>-хук, а не хук среды — несмотря на путь </a:t>
-            </a:r>
-            <a:r>
-              <a:rPr sz="900" b="0" i="0">
-                <a:solidFill>
-                  <a:srgbClr val="141B2E"/>
-                </a:solidFill>
-                <a:latin typeface="Consolas"/>
-              </a:rPr>
-              <a:t>.claude/hooks/</a:t>
-            </a:r>
-          </a:p>
-        </p:txBody>
-      </p:sp>
-      <p:sp>
-        <p:nvSpPr>
-          <p:cNvPr id="15" name="TextBox 14"/>
-          <p:cNvSpPr txBox="1"/>
-          <p:nvPr/>
-        </p:nvSpPr>
-        <p:spPr>
-          <a:xfrm>
-            <a:off x="6949245" y="5406791"/>
-            <a:ext cx="4462466" cy="237744"/>
-          </a:xfrm>
-          <a:prstGeom prst="rect">
-            <a:avLst/>
-          </a:prstGeom>
-          <a:noFill/>
-        </p:spPr>
-        <p:txBody>
-          <a:bodyPr wrap="square" lIns="0" rIns="0" tIns="0" bIns="0" anchor="ctr">
-            <a:spAutoFit/>
-          </a:bodyPr>
-          <a:lstStyle/>
-          <a:p>
-            <a:pPr algn="l">
-              <a:lnSpc>
-                <a:spcPct val="104000"/>
-              </a:lnSpc>
-              <a:spcAft>
-                <a:spcPts val="0"/>
-              </a:spcAft>
-            </a:pPr>
-            <a:r>
-              <a:rPr sz="900" b="0" i="0">
-                <a:solidFill>
-                  <a:srgbClr val="141B2E"/>
-                </a:solidFill>
-                <a:latin typeface="Consolas"/>
-              </a:rPr>
               <a:t>cat .claude/settings.json</a:t>
             </a:r>
             <a:r>
-              <a:rPr sz="900" b="0" i="0">
+              <a:rPr sz="1000" b="0" i="0">
                 <a:solidFill>
                   <a:srgbClr val="141B2E"/>
                 </a:solidFill>
@@ -7539,7 +7262,7 @@
               <a:t> → </a:t>
             </a:r>
             <a:r>
-              <a:rPr sz="900" b="0" i="0">
+              <a:rPr sz="1000" b="0" i="0">
                 <a:solidFill>
                   <a:srgbClr val="141B2E"/>
                 </a:solidFill>
@@ -7552,13 +7275,13 @@
       </p:sp>
       <p:cxnSp>
         <p:nvCxnSpPr>
-          <p:cNvPr id="16" name="Connector 15"/>
+          <p:cNvPr id="14" name="Connector 13"/>
           <p:cNvCxnSpPr/>
           <p:nvPr/>
         </p:nvCxnSpPr>
         <p:spPr>
           <a:xfrm>
-            <a:off x="630936" y="5644535"/>
+            <a:off x="630936" y="5101805"/>
             <a:ext cx="10927080" cy="0"/>
           </a:xfrm>
           <a:prstGeom prst="line">
@@ -7587,14 +7310,14 @@
       </p:cxnSp>
       <p:sp>
         <p:nvSpPr>
-          <p:cNvPr id="17" name="TextBox 16"/>
-          <p:cNvSpPr txBox="1"/>
-          <p:nvPr/>
-        </p:nvSpPr>
-        <p:spPr>
-          <a:xfrm>
-            <a:off x="630936" y="5644535"/>
-            <a:ext cx="6172005" cy="237744"/>
+          <p:cNvPr id="15" name="TextBox 14"/>
+          <p:cNvSpPr txBox="1"/>
+          <p:nvPr/>
+        </p:nvSpPr>
+        <p:spPr>
+          <a:xfrm>
+            <a:off x="630936" y="5101805"/>
+            <a:ext cx="4991327" cy="237744"/>
           </a:xfrm>
           <a:prstGeom prst="rect">
             <a:avLst/>
@@ -7616,7 +7339,7 @@
               </a:spcAft>
             </a:pPr>
             <a:r>
-              <a:rPr sz="900" b="0" i="0">
+              <a:rPr sz="1000" b="0" i="0">
                 <a:solidFill>
                   <a:srgbClr val="141B2E"/>
                 </a:solidFill>
@@ -7625,7 +7348,7 @@
               <a:t>как </a:t>
             </a:r>
             <a:r>
-              <a:rPr sz="900" b="0" i="0">
+              <a:rPr sz="1000" b="0" i="0">
                 <a:solidFill>
                   <a:srgbClr val="141B2E"/>
                 </a:solidFill>
@@ -7634,27 +7357,27 @@
               <a:t>git</a:t>
             </a:r>
             <a:r>
-              <a:rPr sz="900" b="0" i="0">
-                <a:solidFill>
-                  <a:srgbClr val="141B2E"/>
-                </a:solidFill>
-                <a:latin typeface="Arial"/>
-              </a:rPr>
-              <a:t>-хук он не установлен</a:t>
-            </a:r>
-          </a:p>
-        </p:txBody>
-      </p:sp>
-      <p:sp>
-        <p:nvSpPr>
-          <p:cNvPr id="18" name="TextBox 17"/>
-          <p:cNvSpPr txBox="1"/>
-          <p:nvPr/>
-        </p:nvSpPr>
-        <p:spPr>
-          <a:xfrm>
-            <a:off x="6949245" y="5644535"/>
-            <a:ext cx="4462466" cy="237744"/>
+              <a:rPr sz="1000" b="0" i="0">
+                <a:solidFill>
+                  <a:srgbClr val="141B2E"/>
+                </a:solidFill>
+                <a:latin typeface="Arial"/>
+              </a:rPr>
+              <a:t>-хук не установлен</a:t>
+            </a:r>
+          </a:p>
+        </p:txBody>
+      </p:sp>
+      <p:sp>
+        <p:nvSpPr>
+          <p:cNvPr id="16" name="TextBox 15"/>
+          <p:cNvSpPr txBox="1"/>
+          <p:nvPr/>
+        </p:nvSpPr>
+        <p:spPr>
+          <a:xfrm>
+            <a:off x="5768567" y="5101805"/>
+            <a:ext cx="5643144" cy="237744"/>
           </a:xfrm>
           <a:prstGeom prst="rect">
             <a:avLst/>
@@ -7676,7 +7399,7 @@
               </a:spcAft>
             </a:pPr>
             <a:r>
-              <a:rPr sz="900" b="0" i="0">
+              <a:rPr sz="1000" b="0" i="0">
                 <a:solidFill>
                   <a:srgbClr val="141B2E"/>
                 </a:solidFill>
@@ -7685,16 +7408,16 @@
               <a:t>ls .git/hooks/</a:t>
             </a:r>
             <a:r>
-              <a:rPr sz="900" b="0" i="0">
-                <a:solidFill>
-                  <a:srgbClr val="141B2E"/>
-                </a:solidFill>
-                <a:latin typeface="Arial"/>
-              </a:rPr>
-              <a:t> → только шаблоны </a:t>
-            </a:r>
-            <a:r>
-              <a:rPr sz="900" b="0" i="0">
+              <a:rPr sz="1000" b="0" i="0">
+                <a:solidFill>
+                  <a:srgbClr val="141B2E"/>
+                </a:solidFill>
+                <a:latin typeface="Arial"/>
+              </a:rPr>
+              <a:t> → только </a:t>
+            </a:r>
+            <a:r>
+              <a:rPr sz="1000" b="0" i="0">
                 <a:solidFill>
                   <a:srgbClr val="141B2E"/>
                 </a:solidFill>
@@ -7707,13 +7430,13 @@
       </p:sp>
       <p:cxnSp>
         <p:nvCxnSpPr>
-          <p:cNvPr id="19" name="Connector 18"/>
+          <p:cNvPr id="17" name="Connector 16"/>
           <p:cNvCxnSpPr/>
           <p:nvPr/>
         </p:nvCxnSpPr>
         <p:spPr>
           <a:xfrm>
-            <a:off x="630936" y="5882279"/>
+            <a:off x="630936" y="5339549"/>
             <a:ext cx="10927080" cy="0"/>
           </a:xfrm>
           <a:prstGeom prst="line">
@@ -7742,14 +7465,14 @@
       </p:cxnSp>
       <p:sp>
         <p:nvSpPr>
-          <p:cNvPr id="20" name="TextBox 19"/>
-          <p:cNvSpPr txBox="1"/>
-          <p:nvPr/>
-        </p:nvSpPr>
-        <p:spPr>
-          <a:xfrm>
-            <a:off x="630936" y="5882279"/>
-            <a:ext cx="6172005" cy="237744"/>
+          <p:cNvPr id="18" name="TextBox 17"/>
+          <p:cNvSpPr txBox="1"/>
+          <p:nvPr/>
+        </p:nvSpPr>
+        <p:spPr>
+          <a:xfrm>
+            <a:off x="630936" y="5339549"/>
+            <a:ext cx="4991327" cy="237744"/>
           </a:xfrm>
           <a:prstGeom prst="rect">
             <a:avLst/>
@@ -7771,27 +7494,27 @@
               </a:spcAft>
             </a:pPr>
             <a:r>
-              <a:rPr sz="900" b="0" i="0">
-                <a:solidFill>
-                  <a:srgbClr val="141B2E"/>
-                </a:solidFill>
-                <a:latin typeface="Arial"/>
-              </a:rPr>
-              <a:t>библиотеки, которую он зовёт, в окружении нет — а он глотает ошибку</a:t>
-            </a:r>
-          </a:p>
-        </p:txBody>
-      </p:sp>
-      <p:sp>
-        <p:nvSpPr>
-          <p:cNvPr id="21" name="TextBox 20"/>
-          <p:cNvSpPr txBox="1"/>
-          <p:nvPr/>
-        </p:nvSpPr>
-        <p:spPr>
-          <a:xfrm>
-            <a:off x="6949245" y="5882279"/>
-            <a:ext cx="4462466" cy="237744"/>
+              <a:rPr sz="1000" b="0" i="0">
+                <a:solidFill>
+                  <a:srgbClr val="141B2E"/>
+                </a:solidFill>
+                <a:latin typeface="Arial"/>
+              </a:rPr>
+              <a:t>зовёт библиотеку, которой нет</a:t>
+            </a:r>
+          </a:p>
+        </p:txBody>
+      </p:sp>
+      <p:sp>
+        <p:nvSpPr>
+          <p:cNvPr id="19" name="TextBox 18"/>
+          <p:cNvSpPr txBox="1"/>
+          <p:nvPr/>
+        </p:nvSpPr>
+        <p:spPr>
+          <a:xfrm>
+            <a:off x="5768567" y="5339549"/>
+            <a:ext cx="5643144" cy="237744"/>
           </a:xfrm>
           <a:prstGeom prst="rect">
             <a:avLst/>
@@ -7813,16 +7536,16 @@
               </a:spcAft>
             </a:pPr>
             <a:r>
-              <a:rPr sz="900" b="0" i="0">
+              <a:rPr sz="1000" b="0" i="0">
                 <a:solidFill>
                   <a:srgbClr val="141B2E"/>
                 </a:solidFill>
                 <a:latin typeface="Consolas"/>
               </a:rPr>
-              <a:t>bash …/pre-commit-viz.sh; echo $?</a:t>
-            </a:r>
-            <a:r>
-              <a:rPr sz="900" b="0" i="0">
+              <a:t>bash …pre-commit-viz.sh; echo $?</a:t>
+            </a:r>
+            <a:r>
+              <a:rPr sz="1000" b="0" i="0">
                 <a:solidFill>
                   <a:srgbClr val="141B2E"/>
                 </a:solidFill>
@@ -7831,7 +7554,7 @@
               <a:t> → </a:t>
             </a:r>
             <a:r>
-              <a:rPr sz="900" b="1" i="0">
+              <a:rPr sz="1000" b="1" i="0">
                 <a:solidFill>
                   <a:srgbClr val="141B2E"/>
                 </a:solidFill>
@@ -7844,13 +7567,13 @@
       </p:sp>
       <p:sp>
         <p:nvSpPr>
-          <p:cNvPr id="22" name="Rounded Rectangle 21"/>
+          <p:cNvPr id="20" name="Rounded Rectangle 19"/>
           <p:cNvSpPr/>
           <p:nvPr/>
         </p:nvSpPr>
         <p:spPr>
           <a:xfrm>
-            <a:off x="502920" y="6412631"/>
+            <a:off x="502920" y="5869901"/>
             <a:ext cx="82296" cy="455422"/>
           </a:xfrm>
           <a:prstGeom prst="roundRect">
@@ -7890,13 +7613,13 @@
       </p:sp>
       <p:sp>
         <p:nvSpPr>
-          <p:cNvPr id="23" name="TextBox 22"/>
-          <p:cNvSpPr txBox="1"/>
-          <p:nvPr/>
-        </p:nvSpPr>
-        <p:spPr>
-          <a:xfrm>
-            <a:off x="859536" y="6540647"/>
+          <p:cNvPr id="21" name="TextBox 20"/>
+          <p:cNvSpPr txBox="1"/>
+          <p:nvPr/>
+        </p:nvSpPr>
+        <p:spPr>
+          <a:xfrm>
+            <a:off x="859536" y="5997917"/>
             <a:ext cx="10643616" cy="199389"/>
           </a:xfrm>
           <a:prstGeom prst="rect">
@@ -7925,7 +7648,7 @@
                 </a:solidFill>
                 <a:latin typeface="Arial"/>
               </a:rPr>
-              <a:t>Исполняемый файл в папке с правильным именем — </a:t>
+              <a:t>Барьер — это регистрация плюс </a:t>
             </a:r>
             <a:r>
               <a:rPr sz="1150" b="1" i="0">
@@ -7934,7 +7657,7 @@
                 </a:solidFill>
                 <a:latin typeface="Arial"/>
               </a:rPr>
-              <a:t>не барьер</a:t>
+              <a:t>доказанный громкий отказ</a:t>
             </a:r>
             <a:r>
               <a:rPr sz="1150" b="1" i="0">
@@ -7943,14 +7666,14 @@
                 </a:solidFill>
                 <a:latin typeface="Arial"/>
               </a:rPr>
-              <a:t>. Барьер — это регистрация плюс доказанный громкий отказ.</a:t>
-            </a:r>
-          </a:p>
-        </p:txBody>
-      </p:sp>
-      <p:sp>
-        <p:nvSpPr>
-          <p:cNvPr id="24" name="TextBox 23"/>
+              <a:t>.</a:t>
+            </a:r>
+          </a:p>
+        </p:txBody>
+      </p:sp>
+      <p:sp>
+        <p:nvSpPr>
+          <p:cNvPr id="22" name="TextBox 21"/>
           <p:cNvSpPr txBox="1"/>
           <p:nvPr/>
         </p:nvSpPr>
@@ -11561,7 +11284,7 @@
         </p:nvSpPr>
         <p:spPr>
           <a:xfrm>
-            <a:off x="502920" y="1420291"/>
+            <a:off x="502920" y="1628546"/>
             <a:ext cx="32004" cy="525780"/>
           </a:xfrm>
           <a:prstGeom prst="rect">
@@ -11605,7 +11328,7 @@
         </p:nvSpPr>
         <p:spPr>
           <a:xfrm>
-            <a:off x="772668" y="1475155"/>
+            <a:off x="772668" y="1683410"/>
             <a:ext cx="10730484" cy="416052"/>
           </a:xfrm>
           <a:prstGeom prst="rect">
@@ -11701,7 +11424,7 @@
         </p:nvSpPr>
         <p:spPr>
           <a:xfrm>
-            <a:off x="502920" y="2470899"/>
+            <a:off x="502920" y="2858414"/>
             <a:ext cx="11183112" cy="822960"/>
           </a:xfrm>
           <a:prstGeom prst="roundRect">
@@ -11749,7 +11472,7 @@
         </p:nvSpPr>
         <p:spPr>
           <a:xfrm>
-            <a:off x="722376" y="2598915"/>
+            <a:off x="722376" y="2986430"/>
             <a:ext cx="10744200" cy="566928"/>
           </a:xfrm>
           <a:prstGeom prst="rect">
@@ -11791,7 +11514,7 @@
         </p:nvSpPr>
         <p:spPr>
           <a:xfrm>
-            <a:off x="502920" y="3782110"/>
+            <a:off x="502920" y="4348886"/>
             <a:ext cx="2119579" cy="1051560"/>
           </a:xfrm>
           <a:prstGeom prst="roundRect">
@@ -11839,7 +11562,7 @@
         </p:nvSpPr>
         <p:spPr>
           <a:xfrm>
-            <a:off x="612648" y="3782110"/>
+            <a:off x="612648" y="4348886"/>
             <a:ext cx="1900123" cy="1051560"/>
           </a:xfrm>
           <a:prstGeom prst="rect">
@@ -11881,7 +11604,7 @@
         </p:nvSpPr>
         <p:spPr>
           <a:xfrm>
-            <a:off x="2768803" y="3782110"/>
+            <a:off x="2768803" y="4348886"/>
             <a:ext cx="2119579" cy="1051560"/>
           </a:xfrm>
           <a:prstGeom prst="roundRect">
@@ -11929,7 +11652,7 @@
         </p:nvSpPr>
         <p:spPr>
           <a:xfrm>
-            <a:off x="2878531" y="3782110"/>
+            <a:off x="2878531" y="4348886"/>
             <a:ext cx="1900123" cy="1051560"/>
           </a:xfrm>
           <a:prstGeom prst="rect">
@@ -11971,7 +11694,7 @@
         </p:nvSpPr>
         <p:spPr>
           <a:xfrm>
-            <a:off x="5034686" y="3782110"/>
+            <a:off x="5034686" y="4348886"/>
             <a:ext cx="2119579" cy="1051560"/>
           </a:xfrm>
           <a:prstGeom prst="roundRect">
@@ -12019,7 +11742,7 @@
         </p:nvSpPr>
         <p:spPr>
           <a:xfrm>
-            <a:off x="5144414" y="3782110"/>
+            <a:off x="5144414" y="4348886"/>
             <a:ext cx="1900123" cy="1051560"/>
           </a:xfrm>
           <a:prstGeom prst="rect">
@@ -12061,7 +11784,7 @@
         </p:nvSpPr>
         <p:spPr>
           <a:xfrm>
-            <a:off x="7300569" y="3782110"/>
+            <a:off x="7300569" y="4348886"/>
             <a:ext cx="2119579" cy="1051560"/>
           </a:xfrm>
           <a:prstGeom prst="roundRect">
@@ -12109,7 +11832,7 @@
         </p:nvSpPr>
         <p:spPr>
           <a:xfrm>
-            <a:off x="7410297" y="3782110"/>
+            <a:off x="7410297" y="4348886"/>
             <a:ext cx="1900123" cy="1051560"/>
           </a:xfrm>
           <a:prstGeom prst="rect">
@@ -12151,7 +11874,7 @@
         </p:nvSpPr>
         <p:spPr>
           <a:xfrm>
-            <a:off x="9566452" y="3782110"/>
+            <a:off x="9566452" y="4348886"/>
             <a:ext cx="2119579" cy="1051560"/>
           </a:xfrm>
           <a:prstGeom prst="roundRect">
@@ -12199,7 +11922,7 @@
         </p:nvSpPr>
         <p:spPr>
           <a:xfrm>
-            <a:off x="9676180" y="3782110"/>
+            <a:off x="9676180" y="4348886"/>
             <a:ext cx="1900123" cy="1051560"/>
           </a:xfrm>
           <a:prstGeom prst="rect">
@@ -12235,93 +11958,7 @@
       </p:sp>
       <p:sp>
         <p:nvSpPr>
-          <p:cNvPr id="18" name="Rectangle 17"/>
-          <p:cNvSpPr/>
-          <p:nvPr/>
-        </p:nvSpPr>
-        <p:spPr>
-          <a:xfrm>
-            <a:off x="502920" y="5358498"/>
-            <a:ext cx="32004" cy="317754"/>
-          </a:xfrm>
-          <a:prstGeom prst="rect">
-            <a:avLst/>
-          </a:prstGeom>
-          <a:solidFill>
-            <a:srgbClr val="028090"/>
-          </a:solidFill>
-          <a:ln>
-            <a:noFill/>
-          </a:ln>
-          <a:effectLst/>
-        </p:spPr>
-        <p:style>
-          <a:lnRef idx="1">
-            <a:schemeClr val="accent1"/>
-          </a:lnRef>
-          <a:fillRef idx="3">
-            <a:schemeClr val="accent1"/>
-          </a:fillRef>
-          <a:effectRef idx="2">
-            <a:schemeClr val="accent1"/>
-          </a:effectRef>
-          <a:fontRef idx="minor">
-            <a:schemeClr val="lt1"/>
-          </a:fontRef>
-        </p:style>
-        <p:txBody>
-          <a:bodyPr rtlCol="0" anchor="ctr"/>
-          <a:lstStyle/>
-          <a:p>
-            <a:pPr algn="ctr"/>
-          </a:p>
-        </p:txBody>
-      </p:sp>
-      <p:sp>
-        <p:nvSpPr>
-          <p:cNvPr id="19" name="TextBox 18"/>
-          <p:cNvSpPr txBox="1"/>
-          <p:nvPr/>
-        </p:nvSpPr>
-        <p:spPr>
-          <a:xfrm>
-            <a:off x="772668" y="5413362"/>
-            <a:ext cx="10730484" cy="208025"/>
-          </a:xfrm>
-          <a:prstGeom prst="rect">
-            <a:avLst/>
-          </a:prstGeom>
-          <a:noFill/>
-        </p:spPr>
-        <p:txBody>
-          <a:bodyPr wrap="square" lIns="0" rIns="0" tIns="0" bIns="0" anchor="ctr">
-            <a:spAutoFit/>
-          </a:bodyPr>
-          <a:lstStyle/>
-          <a:p>
-            <a:pPr algn="l">
-              <a:lnSpc>
-                <a:spcPct val="126000"/>
-              </a:lnSpc>
-              <a:spcAft>
-                <a:spcPts val="300"/>
-              </a:spcAft>
-            </a:pPr>
-            <a:r>
-              <a:rPr sz="1300" b="0" i="1">
-                <a:solidFill>
-                  <a:srgbClr val="6B7685"/>
-                </a:solidFill>
-                <a:latin typeface="Arial"/>
-              </a:rPr>
-              <a:t>разбор — на следующем слайде</a:t>
-            </a:r>
-          </a:p>
-        </p:txBody>
-      </p:sp>
-      <p:sp>
-        <p:nvSpPr>
-          <p:cNvPr id="20" name="TextBox 19"/>
+          <p:cNvPr id="18" name="TextBox 17"/>
           <p:cNvSpPr txBox="1"/>
           <p:nvPr/>
         </p:nvSpPr>
@@ -12363,7 +12000,7 @@
       </p:sp>
       <p:sp>
         <p:nvSpPr>
-          <p:cNvPr id="21" name="TextBox 20"/>
+          <p:cNvPr id="19" name="TextBox 18"/>
           <p:cNvSpPr txBox="1"/>
           <p:nvPr/>
         </p:nvSpPr>
@@ -17436,8 +17073,8 @@
         </p:blipFill>
         <p:spPr>
           <a:xfrm>
-            <a:off x="2394557" y="1254252"/>
-            <a:ext cx="7399837" cy="1603298"/>
+            <a:off x="2109688" y="1254252"/>
+            <a:ext cx="7969574" cy="1361468"/>
           </a:xfrm>
           <a:prstGeom prst="rect">
             <a:avLst/>
@@ -17452,12 +17089,12 @@
         </p:nvSpPr>
         <p:spPr>
           <a:xfrm>
-            <a:off x="502920" y="3022142"/>
-            <a:ext cx="11183112" cy="2803090"/>
+            <a:off x="502920" y="2780312"/>
+            <a:ext cx="11183112" cy="2915411"/>
           </a:xfrm>
           <a:prstGeom prst="roundRect">
             <a:avLst>
-              <a:gd name="adj" fmla="val 7249"/>
+              <a:gd name="adj" fmla="val 6969"/>
             </a:avLst>
           </a:prstGeom>
           <a:solidFill>
@@ -17500,8 +17137,8 @@
         </p:nvSpPr>
         <p:spPr>
           <a:xfrm>
-            <a:off x="722376" y="3205022"/>
-            <a:ext cx="10744200" cy="2437330"/>
+            <a:off x="722376" y="2963192"/>
+            <a:ext cx="10744200" cy="2549652"/>
           </a:xfrm>
           <a:prstGeom prst="rect">
             <a:avLst/>
@@ -17529,7 +17166,7 @@
                 </a:solidFill>
                 <a:latin typeface="Consolas"/>
               </a:rPr>
-              <a:t>  # CLAUDE.md</a:t>
+              <a:t># CLAUDE.md</a:t>
             </a:r>
           </a:p>
           <a:p>
@@ -17567,7 +17204,7 @@
                 </a:solidFill>
                 <a:latin typeface="Consolas"/>
               </a:rPr>
-              <a:t>  signup-landing: статический лендинг с формой заявки на демо-урок.</a:t>
+              <a:t>signup-landing: статический лендинг с формой заявки на демо-урок.</a:t>
             </a:r>
           </a:p>
           <a:p>
@@ -17586,7 +17223,7 @@
                 </a:solidFill>
                 <a:latin typeface="Consolas"/>
               </a:rPr>
-              <a:t>  Готово = `npm run build` код 0, `npx playwright test` зелёный, форма</a:t>
+              <a:t>Готово = `npm run build` код 0, `npx playwright test` зелёный, форма</a:t>
             </a:r>
           </a:p>
           <a:p>
@@ -17605,7 +17242,7 @@
                 </a:solidFill>
                 <a:latin typeface="Consolas"/>
               </a:rPr>
-              <a:t>  отправлена руками из собранного `dist/` — и заполненная, и пустая.</a:t>
+              <a:t>отправлена руками из собранного `dist/` — и заполненная, и пустая.</a:t>
             </a:r>
           </a:p>
           <a:p>
@@ -17643,7 +17280,7 @@
                 </a:solidFill>
                 <a:latin typeface="Consolas"/>
               </a:rPr>
-              <a:t>  ## Safety / scope boundaries</a:t>
+              <a:t>## Safety / scope boundaries</a:t>
             </a:r>
           </a:p>
           <a:p>
@@ -17662,7 +17299,7 @@
                 </a:solidFill>
                 <a:latin typeface="Consolas"/>
               </a:rPr>
-              <a:t>  - Никогда не запускать деплой на прод без явного запроса.</a:t>
+              <a:t>- Никогда не запускать деплой на прод без явного запроса.</a:t>
             </a:r>
           </a:p>
           <a:p>
@@ -17700,7 +17337,7 @@
                 </a:solidFill>
                 <a:latin typeface="Consolas"/>
               </a:rPr>
-              <a:t>  ## Build, test, verify</a:t>
+              <a:t>## Build, test, verify</a:t>
             </a:r>
           </a:p>
           <a:p>
@@ -17719,7 +17356,7 @@
                 </a:solidFill>
                 <a:latin typeface="Consolas"/>
               </a:rPr>
-              <a:t>  - To verify: открыть `dist/index.html` после сборки и отправить форму</a:t>
+              <a:t>- To verify: открыть `dist/index.html` после сборки и отправить форму</a:t>
             </a:r>
           </a:p>
           <a:p>
@@ -17738,7 +17375,7 @@
                 </a:solidFill>
                 <a:latin typeface="Consolas"/>
               </a:rPr>
-              <a:t>    руками — с заполненными и с пустыми полями.</a:t>
+              <a:t>  руками — с заполненными и с пустыми полями.</a:t>
             </a:r>
           </a:p>
           <a:p>
@@ -17757,7 +17394,7 @@
                 </a:solidFill>
                 <a:latin typeface="Consolas"/>
               </a:rPr>
-              <a:t>  - Один раз на машину, до первого `npx playwright test`: `npm ci`, затем</a:t>
+              <a:t>- Один раз на машину, до первого `npx playwright test`: `npm ci`, затем</a:t>
             </a:r>
           </a:p>
           <a:p>
@@ -17776,7 +17413,7 @@
                 </a:solidFill>
                 <a:latin typeface="Consolas"/>
               </a:rPr>
-              <a:t>    `npx playwright install chromium`. Без второй команды падают все тесты</a:t>
+              <a:t>  `npx playwright install chromium`. Без второй команды падают все тесты</a:t>
             </a:r>
           </a:p>
           <a:p>
@@ -17795,7 +17432,7 @@
                 </a:solidFill>
                 <a:latin typeface="Consolas"/>
               </a:rPr>
-              <a:t>    сразу и не по делу.</a:t>
+              <a:t>  сразу и не по делу.</a:t>
             </a:r>
           </a:p>
           <a:p>
@@ -17833,7 +17470,7 @@
                 </a:solidFill>
                 <a:latin typeface="Consolas"/>
               </a:rPr>
-              <a:t>  ## Задачная память</a:t>
+              <a:t>## Задачная память</a:t>
             </a:r>
           </a:p>
           <a:p>
@@ -17852,7 +17489,7 @@
                 </a:solidFill>
                 <a:latin typeface="Consolas"/>
               </a:rPr>
-              <a:t>  - На многошаговую задачу — файл в `.tasks/active/`, до первой правки.</a:t>
+              <a:t>- На многошаговую задачу — файл в `.tasks/active/`, до первой правки.</a:t>
             </a:r>
           </a:p>
           <a:p>
@@ -17871,7 +17508,7 @@
                 </a:solidFill>
                 <a:latin typeface="Consolas"/>
               </a:rPr>
-              <a:t>  - Договорённость или решение по ходу — в этот файл сразу, а не в конце сессии.</a:t>
+              <a:t>- Договорённость или решение по ходу — в этот файл сразу, а не в конце сессии.</a:t>
             </a:r>
           </a:p>
           <a:p>
@@ -17890,7 +17527,7 @@
                 </a:solidFill>
                 <a:latin typeface="Consolas"/>
               </a:rPr>
-              <a:t>  - План сверять в начале и в конце сессии, дату ставить `date -u +%Y-%m-%dT%H:%M:%SZ`.</a:t>
+              <a:t>- План сверять в начале и в конце сессии, дату ставить `date -u +%Y-%m-%dT%H:%M:%SZ`.</a:t>
             </a:r>
           </a:p>
         </p:txBody>
@@ -17903,7 +17540,7 @@
         </p:nvSpPr>
         <p:spPr>
           <a:xfrm>
-            <a:off x="502920" y="5989824"/>
+            <a:off x="502920" y="5860316"/>
             <a:ext cx="82296" cy="455422"/>
           </a:xfrm>
           <a:prstGeom prst="roundRect">
@@ -17949,7 +17586,7 @@
         </p:nvSpPr>
         <p:spPr>
           <a:xfrm>
-            <a:off x="859536" y="6117840"/>
+            <a:off x="859536" y="5988332"/>
             <a:ext cx="10643616" cy="199389"/>
           </a:xfrm>
           <a:prstGeom prst="rect">
@@ -17987,7 +17624,7 @@
                 </a:solidFill>
                 <a:latin typeface="Arial"/>
               </a:rPr>
-              <a:t> показ заказчику завтра — и правка уезжает мимо ветки прямо в то, что ему покажут.</a:t>
+              <a:t> показ заказчику завтра — правка уезжает мимо ветки прямо в него.</a:t>
             </a:r>
           </a:p>
         </p:txBody>
@@ -20485,7 +20122,7 @@
         </p:nvSpPr>
         <p:spPr>
           <a:xfrm>
-            <a:off x="502920" y="1359743"/>
+            <a:off x="502920" y="1432521"/>
             <a:ext cx="32004" cy="317754"/>
           </a:xfrm>
           <a:prstGeom prst="rect">
@@ -20529,7 +20166,7 @@
         </p:nvSpPr>
         <p:spPr>
           <a:xfrm>
-            <a:off x="772668" y="1414607"/>
+            <a:off x="772668" y="1487385"/>
             <a:ext cx="10730484" cy="208025"/>
           </a:xfrm>
           <a:prstGeom prst="rect">
@@ -20571,7 +20208,7 @@
         </p:nvSpPr>
         <p:spPr>
           <a:xfrm>
-            <a:off x="502920" y="2050953"/>
+            <a:off x="502920" y="2305678"/>
             <a:ext cx="11183112" cy="822960"/>
           </a:xfrm>
           <a:prstGeom prst="roundRect">
@@ -20619,7 +20256,7 @@
         </p:nvSpPr>
         <p:spPr>
           <a:xfrm>
-            <a:off x="722376" y="2178969"/>
+            <a:off x="722376" y="2433694"/>
             <a:ext cx="10744200" cy="566928"/>
           </a:xfrm>
           <a:prstGeom prst="rect">
@@ -20661,7 +20298,7 @@
         </p:nvSpPr>
         <p:spPr>
           <a:xfrm>
-            <a:off x="502920" y="3210793"/>
+            <a:off x="502920" y="3647465"/>
             <a:ext cx="2119579" cy="1051560"/>
           </a:xfrm>
           <a:prstGeom prst="roundRect">
@@ -20709,7 +20346,7 @@
         </p:nvSpPr>
         <p:spPr>
           <a:xfrm>
-            <a:off x="612648" y="3210793"/>
+            <a:off x="612648" y="3647465"/>
             <a:ext cx="1900123" cy="1051560"/>
           </a:xfrm>
           <a:prstGeom prst="rect">
@@ -20751,7 +20388,7 @@
         </p:nvSpPr>
         <p:spPr>
           <a:xfrm>
-            <a:off x="2768803" y="3210793"/>
+            <a:off x="2768803" y="3647465"/>
             <a:ext cx="2119579" cy="1051560"/>
           </a:xfrm>
           <a:prstGeom prst="roundRect">
@@ -20799,7 +20436,7 @@
         </p:nvSpPr>
         <p:spPr>
           <a:xfrm>
-            <a:off x="2878531" y="3210793"/>
+            <a:off x="2878531" y="3647465"/>
             <a:ext cx="1900123" cy="1051560"/>
           </a:xfrm>
           <a:prstGeom prst="rect">
@@ -20841,7 +20478,7 @@
         </p:nvSpPr>
         <p:spPr>
           <a:xfrm>
-            <a:off x="5034686" y="3210793"/>
+            <a:off x="5034686" y="3647465"/>
             <a:ext cx="2119579" cy="1051560"/>
           </a:xfrm>
           <a:prstGeom prst="roundRect">
@@ -20889,7 +20526,7 @@
         </p:nvSpPr>
         <p:spPr>
           <a:xfrm>
-            <a:off x="5144414" y="3210793"/>
+            <a:off x="5144414" y="3647465"/>
             <a:ext cx="1900123" cy="1051560"/>
           </a:xfrm>
           <a:prstGeom prst="rect">
@@ -20931,7 +20568,7 @@
         </p:nvSpPr>
         <p:spPr>
           <a:xfrm>
-            <a:off x="7300569" y="3210793"/>
+            <a:off x="7300569" y="3647465"/>
             <a:ext cx="2119579" cy="1051560"/>
           </a:xfrm>
           <a:prstGeom prst="roundRect">
@@ -20979,7 +20616,7 @@
         </p:nvSpPr>
         <p:spPr>
           <a:xfrm>
-            <a:off x="7410297" y="3210793"/>
+            <a:off x="7410297" y="3647465"/>
             <a:ext cx="1900123" cy="1051560"/>
           </a:xfrm>
           <a:prstGeom prst="rect">
@@ -21021,7 +20658,7 @@
         </p:nvSpPr>
         <p:spPr>
           <a:xfrm>
-            <a:off x="9566452" y="3210793"/>
+            <a:off x="9566452" y="3647465"/>
             <a:ext cx="2119579" cy="1051560"/>
           </a:xfrm>
           <a:prstGeom prst="roundRect">
@@ -21069,7 +20706,7 @@
         </p:nvSpPr>
         <p:spPr>
           <a:xfrm>
-            <a:off x="9676180" y="3210793"/>
+            <a:off x="9676180" y="3647465"/>
             <a:ext cx="1900123" cy="1051560"/>
           </a:xfrm>
           <a:prstGeom prst="rect">
@@ -21111,7 +20748,7 @@
         </p:nvSpPr>
         <p:spPr>
           <a:xfrm>
-            <a:off x="502920" y="4599233"/>
+            <a:off x="502920" y="5217852"/>
             <a:ext cx="11183112" cy="476631"/>
           </a:xfrm>
           <a:prstGeom prst="roundRect">
@@ -21159,7 +20796,7 @@
         </p:nvSpPr>
         <p:spPr>
           <a:xfrm>
-            <a:off x="521208" y="4654097"/>
+            <a:off x="521208" y="5272716"/>
             <a:ext cx="64008" cy="366903"/>
           </a:xfrm>
           <a:prstGeom prst="roundRect">
@@ -21205,7 +20842,7 @@
         </p:nvSpPr>
         <p:spPr>
           <a:xfrm>
-            <a:off x="804672" y="4736393"/>
+            <a:off x="804672" y="5355012"/>
             <a:ext cx="10643616" cy="202311"/>
           </a:xfrm>
           <a:prstGeom prst="rect">
@@ -21259,93 +20896,7 @@
       </p:sp>
       <p:sp>
         <p:nvSpPr>
-          <p:cNvPr id="21" name="Rectangle 20"/>
-          <p:cNvSpPr/>
-          <p:nvPr/>
-        </p:nvSpPr>
-        <p:spPr>
-          <a:xfrm>
-            <a:off x="502920" y="5449321"/>
-            <a:ext cx="32004" cy="317754"/>
-          </a:xfrm>
-          <a:prstGeom prst="rect">
-            <a:avLst/>
-          </a:prstGeom>
-          <a:solidFill>
-            <a:srgbClr val="028090"/>
-          </a:solidFill>
-          <a:ln>
-            <a:noFill/>
-          </a:ln>
-          <a:effectLst/>
-        </p:spPr>
-        <p:style>
-          <a:lnRef idx="1">
-            <a:schemeClr val="accent1"/>
-          </a:lnRef>
-          <a:fillRef idx="3">
-            <a:schemeClr val="accent1"/>
-          </a:fillRef>
-          <a:effectRef idx="2">
-            <a:schemeClr val="accent1"/>
-          </a:effectRef>
-          <a:fontRef idx="minor">
-            <a:schemeClr val="lt1"/>
-          </a:fontRef>
-        </p:style>
-        <p:txBody>
-          <a:bodyPr rtlCol="0" anchor="ctr"/>
-          <a:lstStyle/>
-          <a:p>
-            <a:pPr algn="ctr"/>
-          </a:p>
-        </p:txBody>
-      </p:sp>
-      <p:sp>
-        <p:nvSpPr>
-          <p:cNvPr id="22" name="TextBox 21"/>
-          <p:cNvSpPr txBox="1"/>
-          <p:nvPr/>
-        </p:nvSpPr>
-        <p:spPr>
-          <a:xfrm>
-            <a:off x="772668" y="5504185"/>
-            <a:ext cx="10730484" cy="208025"/>
-          </a:xfrm>
-          <a:prstGeom prst="rect">
-            <a:avLst/>
-          </a:prstGeom>
-          <a:noFill/>
-        </p:spPr>
-        <p:txBody>
-          <a:bodyPr wrap="square" lIns="0" rIns="0" tIns="0" bIns="0" anchor="ctr">
-            <a:spAutoFit/>
-          </a:bodyPr>
-          <a:lstStyle/>
-          <a:p>
-            <a:pPr algn="l">
-              <a:lnSpc>
-                <a:spcPct val="126000"/>
-              </a:lnSpc>
-              <a:spcAft>
-                <a:spcPts val="300"/>
-              </a:spcAft>
-            </a:pPr>
-            <a:r>
-              <a:rPr sz="1300" b="0" i="1">
-                <a:solidFill>
-                  <a:srgbClr val="6B7685"/>
-                </a:solidFill>
-                <a:latin typeface="Arial"/>
-              </a:rPr>
-              <a:t>разбор — на следующем слайде</a:t>
-            </a:r>
-          </a:p>
-        </p:txBody>
-      </p:sp>
-      <p:sp>
-        <p:nvSpPr>
-          <p:cNvPr id="23" name="TextBox 22"/>
+          <p:cNvPr id="21" name="TextBox 20"/>
           <p:cNvSpPr txBox="1"/>
           <p:nvPr/>
         </p:nvSpPr>
@@ -21387,7 +20938,7 @@
       </p:sp>
       <p:sp>
         <p:nvSpPr>
-          <p:cNvPr id="24" name="TextBox 23"/>
+          <p:cNvPr id="22" name="TextBox 21"/>
           <p:cNvSpPr txBox="1"/>
           <p:nvPr/>
         </p:nvSpPr>
@@ -21553,8 +21104,8 @@
         </p:blipFill>
         <p:spPr>
           <a:xfrm>
-            <a:off x="3158076" y="1254252"/>
-            <a:ext cx="5872798" cy="1468199"/>
+            <a:off x="1625999" y="1254252"/>
+            <a:ext cx="8936952" cy="1638441"/>
           </a:xfrm>
           <a:prstGeom prst="rect">
             <a:avLst/>
@@ -21569,7 +21120,1530 @@
         </p:nvSpPr>
         <p:spPr>
           <a:xfrm>
-            <a:off x="502920" y="2887043"/>
+            <a:off x="502920" y="3057285"/>
+            <a:ext cx="11183112" cy="1069467"/>
+          </a:xfrm>
+          <a:prstGeom prst="roundRect">
+            <a:avLst>
+              <a:gd name="adj" fmla="val 25000"/>
+            </a:avLst>
+          </a:prstGeom>
+          <a:solidFill>
+            <a:srgbClr val="FFFFFF"/>
+          </a:solidFill>
+          <a:ln w="17780">
+            <a:solidFill>
+              <a:srgbClr val="065A82"/>
+            </a:solidFill>
+          </a:ln>
+          <a:effectLst/>
+        </p:spPr>
+        <p:style>
+          <a:lnRef idx="1">
+            <a:schemeClr val="accent1"/>
+          </a:lnRef>
+          <a:fillRef idx="3">
+            <a:schemeClr val="accent1"/>
+          </a:fillRef>
+          <a:effectRef idx="2">
+            <a:schemeClr val="accent1"/>
+          </a:effectRef>
+          <a:fontRef idx="minor">
+            <a:schemeClr val="lt1"/>
+          </a:fontRef>
+        </p:style>
+        <p:txBody>
+          <a:bodyPr rtlCol="0" anchor="ctr"/>
+          <a:lstStyle/>
+          <a:p>
+            <a:pPr algn="ctr"/>
+          </a:p>
+        </p:txBody>
+      </p:sp>
+      <p:sp>
+        <p:nvSpPr>
+          <p:cNvPr id="6" name="Rounded Rectangle 5"/>
+          <p:cNvSpPr/>
+          <p:nvPr/>
+        </p:nvSpPr>
+        <p:spPr>
+          <a:xfrm>
+            <a:off x="521208" y="3148725"/>
+            <a:ext cx="68580" cy="886587"/>
+          </a:xfrm>
+          <a:prstGeom prst="roundRect">
+            <a:avLst>
+              <a:gd name="adj" fmla="val 50000"/>
+            </a:avLst>
+          </a:prstGeom>
+          <a:solidFill>
+            <a:srgbClr val="065A82"/>
+          </a:solidFill>
+          <a:ln>
+            <a:noFill/>
+          </a:ln>
+          <a:effectLst/>
+        </p:spPr>
+        <p:style>
+          <a:lnRef idx="1">
+            <a:schemeClr val="accent1"/>
+          </a:lnRef>
+          <a:fillRef idx="3">
+            <a:schemeClr val="accent1"/>
+          </a:fillRef>
+          <a:effectRef idx="2">
+            <a:schemeClr val="accent1"/>
+          </a:effectRef>
+          <a:fontRef idx="minor">
+            <a:schemeClr val="lt1"/>
+          </a:fontRef>
+        </p:style>
+        <p:txBody>
+          <a:bodyPr rtlCol="0" anchor="ctr"/>
+          <a:lstStyle/>
+          <a:p>
+            <a:pPr algn="ctr"/>
+          </a:p>
+        </p:txBody>
+      </p:sp>
+      <p:sp>
+        <p:nvSpPr>
+          <p:cNvPr id="7" name="TextBox 6"/>
+          <p:cNvSpPr txBox="1"/>
+          <p:nvPr/>
+        </p:nvSpPr>
+        <p:spPr>
+          <a:xfrm>
+            <a:off x="630936" y="3185301"/>
+            <a:ext cx="2377143" cy="282067"/>
+          </a:xfrm>
+          <a:prstGeom prst="rect">
+            <a:avLst/>
+          </a:prstGeom>
+          <a:noFill/>
+        </p:spPr>
+        <p:txBody>
+          <a:bodyPr wrap="square" lIns="0" rIns="0" tIns="0" bIns="0" anchor="t">
+            <a:spAutoFit/>
+          </a:bodyPr>
+          <a:lstStyle/>
+          <a:p>
+            <a:pPr algn="l">
+              <a:lnSpc>
+                <a:spcPct val="110000"/>
+              </a:lnSpc>
+              <a:spcAft>
+                <a:spcPts val="0"/>
+              </a:spcAft>
+            </a:pPr>
+            <a:r>
+              <a:rPr sz="1150" b="1" i="0">
+                <a:solidFill>
+                  <a:srgbClr val="065A82"/>
+                </a:solidFill>
+                <a:latin typeface="Arial"/>
+              </a:rPr>
+              <a:t>ХУК</a:t>
+            </a:r>
+          </a:p>
+        </p:txBody>
+      </p:sp>
+      <p:sp>
+        <p:nvSpPr>
+          <p:cNvPr id="8" name="TextBox 7"/>
+          <p:cNvSpPr txBox="1"/>
+          <p:nvPr/>
+        </p:nvSpPr>
+        <p:spPr>
+          <a:xfrm>
+            <a:off x="3154383" y="3185301"/>
+            <a:ext cx="2484349" cy="282067"/>
+          </a:xfrm>
+          <a:prstGeom prst="rect">
+            <a:avLst/>
+          </a:prstGeom>
+          <a:noFill/>
+        </p:spPr>
+        <p:txBody>
+          <a:bodyPr wrap="square" lIns="0" rIns="0" tIns="0" bIns="0" anchor="t">
+            <a:spAutoFit/>
+          </a:bodyPr>
+          <a:lstStyle/>
+          <a:p>
+            <a:pPr algn="l">
+              <a:lnSpc>
+                <a:spcPct val="110000"/>
+              </a:lnSpc>
+              <a:spcAft>
+                <a:spcPts val="0"/>
+              </a:spcAft>
+            </a:pPr>
+            <a:r>
+              <a:rPr sz="1150" b="1" i="0">
+                <a:solidFill>
+                  <a:srgbClr val="065A82"/>
+                </a:solidFill>
+                <a:latin typeface="Arial"/>
+              </a:rPr>
+              <a:t>МАТЧЕР</a:t>
+            </a:r>
+          </a:p>
+        </p:txBody>
+      </p:sp>
+      <p:sp>
+        <p:nvSpPr>
+          <p:cNvPr id="9" name="TextBox 8"/>
+          <p:cNvSpPr txBox="1"/>
+          <p:nvPr/>
+        </p:nvSpPr>
+        <p:spPr>
+          <a:xfrm>
+            <a:off x="5785037" y="3185301"/>
+            <a:ext cx="2539118" cy="282067"/>
+          </a:xfrm>
+          <a:prstGeom prst="rect">
+            <a:avLst/>
+          </a:prstGeom>
+          <a:noFill/>
+        </p:spPr>
+        <p:txBody>
+          <a:bodyPr wrap="square" lIns="0" rIns="0" tIns="0" bIns="0" anchor="t">
+            <a:spAutoFit/>
+          </a:bodyPr>
+          <a:lstStyle/>
+          <a:p>
+            <a:pPr algn="l">
+              <a:lnSpc>
+                <a:spcPct val="110000"/>
+              </a:lnSpc>
+              <a:spcAft>
+                <a:spcPts val="0"/>
+              </a:spcAft>
+            </a:pPr>
+            <a:r>
+              <a:rPr sz="1150" b="1" i="0">
+                <a:solidFill>
+                  <a:srgbClr val="065A82"/>
+                </a:solidFill>
+                <a:latin typeface="Arial"/>
+              </a:rPr>
+              <a:t>ОДНО СРАБАТЫВАНИЕ</a:t>
+            </a:r>
+          </a:p>
+        </p:txBody>
+      </p:sp>
+      <p:sp>
+        <p:nvSpPr>
+          <p:cNvPr id="10" name="TextBox 9"/>
+          <p:cNvSpPr txBox="1"/>
+          <p:nvPr/>
+        </p:nvSpPr>
+        <p:spPr>
+          <a:xfrm>
+            <a:off x="8470459" y="3185301"/>
+            <a:ext cx="2941252" cy="282067"/>
+          </a:xfrm>
+          <a:prstGeom prst="rect">
+            <a:avLst/>
+          </a:prstGeom>
+          <a:noFill/>
+        </p:spPr>
+        <p:txBody>
+          <a:bodyPr wrap="square" lIns="0" rIns="0" tIns="0" bIns="0" anchor="t">
+            <a:spAutoFit/>
+          </a:bodyPr>
+          <a:lstStyle/>
+          <a:p>
+            <a:pPr algn="l">
+              <a:lnSpc>
+                <a:spcPct val="110000"/>
+              </a:lnSpc>
+              <a:spcAft>
+                <a:spcPts val="0"/>
+              </a:spcAft>
+            </a:pPr>
+            <a:r>
+              <a:rPr sz="1150" b="1" i="0">
+                <a:solidFill>
+                  <a:srgbClr val="065A82"/>
+                </a:solidFill>
+                <a:latin typeface="Arial"/>
+              </a:rPr>
+              <a:t>СРАБАТЫВАНИЙ ЗА ЗАДАЧУ</a:t>
+            </a:r>
+          </a:p>
+        </p:txBody>
+      </p:sp>
+      <p:sp>
+        <p:nvSpPr>
+          <p:cNvPr id="11" name="TextBox 10"/>
+          <p:cNvSpPr txBox="1"/>
+          <p:nvPr/>
+        </p:nvSpPr>
+        <p:spPr>
+          <a:xfrm>
+            <a:off x="630936" y="3467368"/>
+            <a:ext cx="2377143" cy="265684"/>
+          </a:xfrm>
+          <a:prstGeom prst="rect">
+            <a:avLst/>
+          </a:prstGeom>
+          <a:noFill/>
+        </p:spPr>
+        <p:txBody>
+          <a:bodyPr wrap="square" lIns="0" rIns="0" tIns="0" bIns="0" anchor="ctr">
+            <a:spAutoFit/>
+          </a:bodyPr>
+          <a:lstStyle/>
+          <a:p>
+            <a:pPr algn="l">
+              <a:lnSpc>
+                <a:spcPct val="104000"/>
+              </a:lnSpc>
+              <a:spcAft>
+                <a:spcPts val="0"/>
+              </a:spcAft>
+            </a:pPr>
+            <a:r>
+              <a:rPr sz="1250" b="1" i="0">
+                <a:solidFill>
+                  <a:srgbClr val="141B2E"/>
+                </a:solidFill>
+                <a:latin typeface="Arial"/>
+              </a:rPr>
+              <a:t>наш барьер ветки</a:t>
+            </a:r>
+          </a:p>
+        </p:txBody>
+      </p:sp>
+      <p:sp>
+        <p:nvSpPr>
+          <p:cNvPr id="12" name="TextBox 11"/>
+          <p:cNvSpPr txBox="1"/>
+          <p:nvPr/>
+        </p:nvSpPr>
+        <p:spPr>
+          <a:xfrm>
+            <a:off x="3154383" y="3467368"/>
+            <a:ext cx="2484349" cy="265684"/>
+          </a:xfrm>
+          <a:prstGeom prst="rect">
+            <a:avLst/>
+          </a:prstGeom>
+          <a:noFill/>
+        </p:spPr>
+        <p:txBody>
+          <a:bodyPr wrap="square" lIns="0" rIns="0" tIns="0" bIns="0" anchor="ctr">
+            <a:spAutoFit/>
+          </a:bodyPr>
+          <a:lstStyle/>
+          <a:p>
+            <a:pPr algn="l">
+              <a:lnSpc>
+                <a:spcPct val="104000"/>
+              </a:lnSpc>
+              <a:spcAft>
+                <a:spcPts val="0"/>
+              </a:spcAft>
+            </a:pPr>
+            <a:r>
+              <a:rPr sz="1250" b="0" i="0">
+                <a:solidFill>
+                  <a:srgbClr val="141B2E"/>
+                </a:solidFill>
+                <a:latin typeface="Consolas"/>
+              </a:rPr>
+              <a:t>Bash</a:t>
+            </a:r>
+            <a:r>
+              <a:rPr sz="1250" b="0" i="0">
+                <a:solidFill>
+                  <a:srgbClr val="141B2E"/>
+                </a:solidFill>
+                <a:latin typeface="Arial"/>
+              </a:rPr>
+              <a:t> + </a:t>
+            </a:r>
+            <a:r>
+              <a:rPr sz="1250" b="0" i="0">
+                <a:solidFill>
+                  <a:srgbClr val="141B2E"/>
+                </a:solidFill>
+                <a:latin typeface="Consolas"/>
+              </a:rPr>
+              <a:t>git commit</a:t>
+            </a:r>
+          </a:p>
+        </p:txBody>
+      </p:sp>
+      <p:sp>
+        <p:nvSpPr>
+          <p:cNvPr id="13" name="TextBox 12"/>
+          <p:cNvSpPr txBox="1"/>
+          <p:nvPr/>
+        </p:nvSpPr>
+        <p:spPr>
+          <a:xfrm>
+            <a:off x="5785037" y="3467368"/>
+            <a:ext cx="2539118" cy="265684"/>
+          </a:xfrm>
+          <a:prstGeom prst="rect">
+            <a:avLst/>
+          </a:prstGeom>
+          <a:noFill/>
+        </p:spPr>
+        <p:txBody>
+          <a:bodyPr wrap="square" lIns="0" rIns="0" tIns="0" bIns="0" anchor="ctr">
+            <a:spAutoFit/>
+          </a:bodyPr>
+          <a:lstStyle/>
+          <a:p>
+            <a:pPr algn="l">
+              <a:lnSpc>
+                <a:spcPct val="104000"/>
+              </a:lnSpc>
+              <a:spcAft>
+                <a:spcPts val="0"/>
+              </a:spcAft>
+            </a:pPr>
+            <a:r>
+              <a:rPr sz="1250" b="1" i="0">
+                <a:solidFill>
+                  <a:srgbClr val="141B2E"/>
+                </a:solidFill>
+                <a:latin typeface="Arial"/>
+              </a:rPr>
+              <a:t>27 мс</a:t>
+            </a:r>
+          </a:p>
+        </p:txBody>
+      </p:sp>
+      <p:sp>
+        <p:nvSpPr>
+          <p:cNvPr id="14" name="TextBox 13"/>
+          <p:cNvSpPr txBox="1"/>
+          <p:nvPr/>
+        </p:nvSpPr>
+        <p:spPr>
+          <a:xfrm>
+            <a:off x="8470459" y="3467368"/>
+            <a:ext cx="2941252" cy="265684"/>
+          </a:xfrm>
+          <a:prstGeom prst="rect">
+            <a:avLst/>
+          </a:prstGeom>
+          <a:noFill/>
+        </p:spPr>
+        <p:txBody>
+          <a:bodyPr wrap="square" lIns="0" rIns="0" tIns="0" bIns="0" anchor="ctr">
+            <a:spAutoFit/>
+          </a:bodyPr>
+          <a:lstStyle/>
+          <a:p>
+            <a:pPr algn="l">
+              <a:lnSpc>
+                <a:spcPct val="104000"/>
+              </a:lnSpc>
+              <a:spcAft>
+                <a:spcPts val="0"/>
+              </a:spcAft>
+            </a:pPr>
+            <a:r>
+              <a:rPr sz="1250" b="1" i="0">
+                <a:solidFill>
+                  <a:srgbClr val="141B2E"/>
+                </a:solidFill>
+                <a:latin typeface="Arial"/>
+              </a:rPr>
+              <a:t>1</a:t>
+            </a:r>
+          </a:p>
+        </p:txBody>
+      </p:sp>
+      <p:cxnSp>
+        <p:nvCxnSpPr>
+          <p:cNvPr id="15" name="Connector 14"/>
+          <p:cNvCxnSpPr/>
+          <p:nvPr/>
+        </p:nvCxnSpPr>
+        <p:spPr>
+          <a:xfrm>
+            <a:off x="630936" y="3733052"/>
+            <a:ext cx="10927080" cy="0"/>
+          </a:xfrm>
+          <a:prstGeom prst="line">
+            <a:avLst/>
+          </a:prstGeom>
+          <a:ln w="9525">
+            <a:solidFill>
+              <a:srgbClr val="E5EAF0"/>
+            </a:solidFill>
+          </a:ln>
+        </p:spPr>
+        <p:style>
+          <a:lnRef idx="2">
+            <a:schemeClr val="accent1"/>
+          </a:lnRef>
+          <a:fillRef idx="0">
+            <a:schemeClr val="accent1"/>
+          </a:fillRef>
+          <a:effectRef idx="1">
+            <a:schemeClr val="accent1"/>
+          </a:effectRef>
+          <a:fontRef idx="minor">
+            <a:schemeClr val="tx1"/>
+          </a:fontRef>
+        </p:style>
+      </p:cxnSp>
+      <p:sp>
+        <p:nvSpPr>
+          <p:cNvPr id="16" name="TextBox 15"/>
+          <p:cNvSpPr txBox="1"/>
+          <p:nvPr/>
+        </p:nvSpPr>
+        <p:spPr>
+          <a:xfrm>
+            <a:off x="630936" y="3733052"/>
+            <a:ext cx="2377143" cy="265684"/>
+          </a:xfrm>
+          <a:prstGeom prst="rect">
+            <a:avLst/>
+          </a:prstGeom>
+          <a:noFill/>
+        </p:spPr>
+        <p:txBody>
+          <a:bodyPr wrap="square" lIns="0" rIns="0" tIns="0" bIns="0" anchor="ctr">
+            <a:spAutoFit/>
+          </a:bodyPr>
+          <a:lstStyle/>
+          <a:p>
+            <a:pPr algn="l">
+              <a:lnSpc>
+                <a:spcPct val="104000"/>
+              </a:lnSpc>
+              <a:spcAft>
+                <a:spcPts val="0"/>
+              </a:spcAft>
+            </a:pPr>
+            <a:r>
+              <a:rPr sz="1250" b="0" i="0">
+                <a:solidFill>
+                  <a:srgbClr val="141B2E"/>
+                </a:solidFill>
+                <a:latin typeface="Arial"/>
+              </a:rPr>
+              <a:t>сборка проекта</a:t>
+            </a:r>
+          </a:p>
+        </p:txBody>
+      </p:sp>
+      <p:sp>
+        <p:nvSpPr>
+          <p:cNvPr id="17" name="TextBox 16"/>
+          <p:cNvSpPr txBox="1"/>
+          <p:nvPr/>
+        </p:nvSpPr>
+        <p:spPr>
+          <a:xfrm>
+            <a:off x="3154383" y="3733052"/>
+            <a:ext cx="2484349" cy="265684"/>
+          </a:xfrm>
+          <a:prstGeom prst="rect">
+            <a:avLst/>
+          </a:prstGeom>
+          <a:noFill/>
+        </p:spPr>
+        <p:txBody>
+          <a:bodyPr wrap="square" lIns="0" rIns="0" tIns="0" bIns="0" anchor="ctr">
+            <a:spAutoFit/>
+          </a:bodyPr>
+          <a:lstStyle/>
+          <a:p>
+            <a:pPr algn="l">
+              <a:lnSpc>
+                <a:spcPct val="104000"/>
+              </a:lnSpc>
+              <a:spcAft>
+                <a:spcPts val="0"/>
+              </a:spcAft>
+            </a:pPr>
+            <a:r>
+              <a:rPr sz="1250" b="0" i="0">
+                <a:solidFill>
+                  <a:srgbClr val="141B2E"/>
+                </a:solidFill>
+                <a:latin typeface="Consolas"/>
+              </a:rPr>
+              <a:t>Edit</a:t>
+            </a:r>
+            <a:r>
+              <a:rPr sz="1250" b="0" i="0">
+                <a:solidFill>
+                  <a:srgbClr val="141B2E"/>
+                </a:solidFill>
+                <a:latin typeface="Arial"/>
+              </a:rPr>
+              <a:t> / </a:t>
+            </a:r>
+            <a:r>
+              <a:rPr sz="1250" b="0" i="0">
+                <a:solidFill>
+                  <a:srgbClr val="141B2E"/>
+                </a:solidFill>
+                <a:latin typeface="Consolas"/>
+              </a:rPr>
+              <a:t>Write</a:t>
+            </a:r>
+          </a:p>
+        </p:txBody>
+      </p:sp>
+      <p:sp>
+        <p:nvSpPr>
+          <p:cNvPr id="18" name="TextBox 17"/>
+          <p:cNvSpPr txBox="1"/>
+          <p:nvPr/>
+        </p:nvSpPr>
+        <p:spPr>
+          <a:xfrm>
+            <a:off x="5785037" y="3733052"/>
+            <a:ext cx="2539118" cy="265684"/>
+          </a:xfrm>
+          <a:prstGeom prst="rect">
+            <a:avLst/>
+          </a:prstGeom>
+          <a:noFill/>
+        </p:spPr>
+        <p:txBody>
+          <a:bodyPr wrap="square" lIns="0" rIns="0" tIns="0" bIns="0" anchor="ctr">
+            <a:spAutoFit/>
+          </a:bodyPr>
+          <a:lstStyle/>
+          <a:p>
+            <a:pPr algn="l">
+              <a:lnSpc>
+                <a:spcPct val="104000"/>
+              </a:lnSpc>
+              <a:spcAft>
+                <a:spcPts val="0"/>
+              </a:spcAft>
+            </a:pPr>
+            <a:r>
+              <a:rPr sz="1250" b="1" i="0">
+                <a:solidFill>
+                  <a:srgbClr val="141B2E"/>
+                </a:solidFill>
+                <a:latin typeface="Arial"/>
+              </a:rPr>
+              <a:t>1 137 мс</a:t>
+            </a:r>
+          </a:p>
+        </p:txBody>
+      </p:sp>
+      <p:sp>
+        <p:nvSpPr>
+          <p:cNvPr id="19" name="TextBox 18"/>
+          <p:cNvSpPr txBox="1"/>
+          <p:nvPr/>
+        </p:nvSpPr>
+        <p:spPr>
+          <a:xfrm>
+            <a:off x="8470459" y="3733052"/>
+            <a:ext cx="2941252" cy="265684"/>
+          </a:xfrm>
+          <a:prstGeom prst="rect">
+            <a:avLst/>
+          </a:prstGeom>
+          <a:noFill/>
+        </p:spPr>
+        <p:txBody>
+          <a:bodyPr wrap="square" lIns="0" rIns="0" tIns="0" bIns="0" anchor="ctr">
+            <a:spAutoFit/>
+          </a:bodyPr>
+          <a:lstStyle/>
+          <a:p>
+            <a:pPr algn="l">
+              <a:lnSpc>
+                <a:spcPct val="104000"/>
+              </a:lnSpc>
+              <a:spcAft>
+                <a:spcPts val="0"/>
+              </a:spcAft>
+            </a:pPr>
+            <a:r>
+              <a:rPr sz="1250" b="1" i="0">
+                <a:solidFill>
+                  <a:srgbClr val="141B2E"/>
+                </a:solidFill>
+                <a:latin typeface="Arial"/>
+              </a:rPr>
+              <a:t>по числу правок</a:t>
+            </a:r>
+          </a:p>
+        </p:txBody>
+      </p:sp>
+      <p:sp>
+        <p:nvSpPr>
+          <p:cNvPr id="20" name="Rounded Rectangle 19"/>
+          <p:cNvSpPr/>
+          <p:nvPr/>
+        </p:nvSpPr>
+        <p:spPr>
+          <a:xfrm>
+            <a:off x="502920" y="4291344"/>
+            <a:ext cx="11183112" cy="1335151"/>
+          </a:xfrm>
+          <a:prstGeom prst="roundRect">
+            <a:avLst>
+              <a:gd name="adj" fmla="val 22828"/>
+            </a:avLst>
+          </a:prstGeom>
+          <a:solidFill>
+            <a:srgbClr val="FFFFFF"/>
+          </a:solidFill>
+          <a:ln w="17780">
+            <a:solidFill>
+              <a:srgbClr val="065A82"/>
+            </a:solidFill>
+          </a:ln>
+          <a:effectLst/>
+        </p:spPr>
+        <p:style>
+          <a:lnRef idx="1">
+            <a:schemeClr val="accent1"/>
+          </a:lnRef>
+          <a:fillRef idx="3">
+            <a:schemeClr val="accent1"/>
+          </a:fillRef>
+          <a:effectRef idx="2">
+            <a:schemeClr val="accent1"/>
+          </a:effectRef>
+          <a:fontRef idx="minor">
+            <a:schemeClr val="lt1"/>
+          </a:fontRef>
+        </p:style>
+        <p:txBody>
+          <a:bodyPr rtlCol="0" anchor="ctr"/>
+          <a:lstStyle/>
+          <a:p>
+            <a:pPr algn="ctr"/>
+          </a:p>
+        </p:txBody>
+      </p:sp>
+      <p:sp>
+        <p:nvSpPr>
+          <p:cNvPr id="21" name="Rounded Rectangle 20"/>
+          <p:cNvSpPr/>
+          <p:nvPr/>
+        </p:nvSpPr>
+        <p:spPr>
+          <a:xfrm>
+            <a:off x="521208" y="4382784"/>
+            <a:ext cx="68580" cy="1152271"/>
+          </a:xfrm>
+          <a:prstGeom prst="roundRect">
+            <a:avLst>
+              <a:gd name="adj" fmla="val 50000"/>
+            </a:avLst>
+          </a:prstGeom>
+          <a:solidFill>
+            <a:srgbClr val="065A82"/>
+          </a:solidFill>
+          <a:ln>
+            <a:noFill/>
+          </a:ln>
+          <a:effectLst/>
+        </p:spPr>
+        <p:style>
+          <a:lnRef idx="1">
+            <a:schemeClr val="accent1"/>
+          </a:lnRef>
+          <a:fillRef idx="3">
+            <a:schemeClr val="accent1"/>
+          </a:fillRef>
+          <a:effectRef idx="2">
+            <a:schemeClr val="accent1"/>
+          </a:effectRef>
+          <a:fontRef idx="minor">
+            <a:schemeClr val="lt1"/>
+          </a:fontRef>
+        </p:style>
+        <p:txBody>
+          <a:bodyPr rtlCol="0" anchor="ctr"/>
+          <a:lstStyle/>
+          <a:p>
+            <a:pPr algn="ctr"/>
+          </a:p>
+        </p:txBody>
+      </p:sp>
+      <p:sp>
+        <p:nvSpPr>
+          <p:cNvPr id="22" name="TextBox 21"/>
+          <p:cNvSpPr txBox="1"/>
+          <p:nvPr/>
+        </p:nvSpPr>
+        <p:spPr>
+          <a:xfrm>
+            <a:off x="630936" y="4419360"/>
+            <a:ext cx="3155006" cy="282067"/>
+          </a:xfrm>
+          <a:prstGeom prst="rect">
+            <a:avLst/>
+          </a:prstGeom>
+          <a:noFill/>
+        </p:spPr>
+        <p:txBody>
+          <a:bodyPr wrap="square" lIns="0" rIns="0" tIns="0" bIns="0" anchor="t">
+            <a:spAutoFit/>
+          </a:bodyPr>
+          <a:lstStyle/>
+          <a:p>
+            <a:pPr algn="l">
+              <a:lnSpc>
+                <a:spcPct val="110000"/>
+              </a:lnSpc>
+              <a:spcAft>
+                <a:spcPts val="0"/>
+              </a:spcAft>
+            </a:pPr>
+            <a:r>
+              <a:rPr sz="1150" b="1" i="0">
+                <a:solidFill>
+                  <a:srgbClr val="065A82"/>
+                </a:solidFill>
+                <a:latin typeface="Arial"/>
+              </a:rPr>
+              <a:t>ЦИКЛ ПРОВЕРОК</a:t>
+            </a:r>
+          </a:p>
+        </p:txBody>
+      </p:sp>
+      <p:sp>
+        <p:nvSpPr>
+          <p:cNvPr id="23" name="TextBox 22"/>
+          <p:cNvSpPr txBox="1"/>
+          <p:nvPr/>
+        </p:nvSpPr>
+        <p:spPr>
+          <a:xfrm>
+            <a:off x="3932246" y="4419360"/>
+            <a:ext cx="2328166" cy="282067"/>
+          </a:xfrm>
+          <a:prstGeom prst="rect">
+            <a:avLst/>
+          </a:prstGeom>
+          <a:noFill/>
+        </p:spPr>
+        <p:txBody>
+          <a:bodyPr wrap="square" lIns="0" rIns="0" tIns="0" bIns="0" anchor="t">
+            <a:spAutoFit/>
+          </a:bodyPr>
+          <a:lstStyle/>
+          <a:p>
+            <a:pPr algn="l">
+              <a:lnSpc>
+                <a:spcPct val="110000"/>
+              </a:lnSpc>
+              <a:spcAft>
+                <a:spcPts val="0"/>
+              </a:spcAft>
+            </a:pPr>
+            <a:r>
+              <a:rPr sz="1150" b="1" i="0">
+                <a:solidFill>
+                  <a:srgbClr val="065A82"/>
+                </a:solidFill>
+                <a:latin typeface="Arial"/>
+              </a:rPr>
+              <a:t>20 ПРАВОК</a:t>
+            </a:r>
+          </a:p>
+        </p:txBody>
+      </p:sp>
+      <p:sp>
+        <p:nvSpPr>
+          <p:cNvPr id="24" name="TextBox 23"/>
+          <p:cNvSpPr txBox="1"/>
+          <p:nvPr/>
+        </p:nvSpPr>
+        <p:spPr>
+          <a:xfrm>
+            <a:off x="6406717" y="4419360"/>
+            <a:ext cx="2328166" cy="282067"/>
+          </a:xfrm>
+          <a:prstGeom prst="rect">
+            <a:avLst/>
+          </a:prstGeom>
+          <a:noFill/>
+        </p:spPr>
+        <p:txBody>
+          <a:bodyPr wrap="square" lIns="0" rIns="0" tIns="0" bIns="0" anchor="t">
+            <a:spAutoFit/>
+          </a:bodyPr>
+          <a:lstStyle/>
+          <a:p>
+            <a:pPr algn="l">
+              <a:lnSpc>
+                <a:spcPct val="110000"/>
+              </a:lnSpc>
+              <a:spcAft>
+                <a:spcPts val="0"/>
+              </a:spcAft>
+            </a:pPr>
+            <a:r>
+              <a:rPr sz="1150" b="1" i="0">
+                <a:solidFill>
+                  <a:srgbClr val="065A82"/>
+                </a:solidFill>
+                <a:latin typeface="Arial"/>
+              </a:rPr>
+              <a:t>40 ПРАВОК</a:t>
+            </a:r>
+          </a:p>
+        </p:txBody>
+      </p:sp>
+      <p:sp>
+        <p:nvSpPr>
+          <p:cNvPr id="25" name="TextBox 24"/>
+          <p:cNvSpPr txBox="1"/>
+          <p:nvPr/>
+        </p:nvSpPr>
+        <p:spPr>
+          <a:xfrm>
+            <a:off x="8881188" y="4419360"/>
+            <a:ext cx="2530523" cy="282067"/>
+          </a:xfrm>
+          <a:prstGeom prst="rect">
+            <a:avLst/>
+          </a:prstGeom>
+          <a:noFill/>
+        </p:spPr>
+        <p:txBody>
+          <a:bodyPr wrap="square" lIns="0" rIns="0" tIns="0" bIns="0" anchor="t">
+            <a:spAutoFit/>
+          </a:bodyPr>
+          <a:lstStyle/>
+          <a:p>
+            <a:pPr algn="l">
+              <a:lnSpc>
+                <a:spcPct val="110000"/>
+              </a:lnSpc>
+              <a:spcAft>
+                <a:spcPts val="0"/>
+              </a:spcAft>
+            </a:pPr>
+            <a:r>
+              <a:rPr sz="1150" b="1" i="0">
+                <a:solidFill>
+                  <a:srgbClr val="065A82"/>
+                </a:solidFill>
+                <a:latin typeface="Arial"/>
+              </a:rPr>
+              <a:t/>
+            </a:r>
+          </a:p>
+        </p:txBody>
+      </p:sp>
+      <p:sp>
+        <p:nvSpPr>
+          <p:cNvPr id="26" name="TextBox 25"/>
+          <p:cNvSpPr txBox="1"/>
+          <p:nvPr/>
+        </p:nvSpPr>
+        <p:spPr>
+          <a:xfrm>
+            <a:off x="630936" y="4701427"/>
+            <a:ext cx="3155006" cy="265684"/>
+          </a:xfrm>
+          <a:prstGeom prst="rect">
+            <a:avLst/>
+          </a:prstGeom>
+          <a:noFill/>
+        </p:spPr>
+        <p:txBody>
+          <a:bodyPr wrap="square" lIns="0" rIns="0" tIns="0" bIns="0" anchor="ctr">
+            <a:spAutoFit/>
+          </a:bodyPr>
+          <a:lstStyle/>
+          <a:p>
+            <a:pPr algn="l">
+              <a:lnSpc>
+                <a:spcPct val="104000"/>
+              </a:lnSpc>
+              <a:spcAft>
+                <a:spcPts val="0"/>
+              </a:spcAft>
+            </a:pPr>
+            <a:r>
+              <a:rPr sz="1250" b="1" i="0">
+                <a:solidFill>
+                  <a:srgbClr val="141B2E"/>
+                </a:solidFill>
+                <a:latin typeface="Arial"/>
+              </a:rPr>
+              <a:t>синтаксис + сборка</a:t>
+            </a:r>
+          </a:p>
+        </p:txBody>
+      </p:sp>
+      <p:sp>
+        <p:nvSpPr>
+          <p:cNvPr id="27" name="TextBox 26"/>
+          <p:cNvSpPr txBox="1"/>
+          <p:nvPr/>
+        </p:nvSpPr>
+        <p:spPr>
+          <a:xfrm>
+            <a:off x="3932246" y="4701427"/>
+            <a:ext cx="2328166" cy="265684"/>
+          </a:xfrm>
+          <a:prstGeom prst="rect">
+            <a:avLst/>
+          </a:prstGeom>
+          <a:noFill/>
+        </p:spPr>
+        <p:txBody>
+          <a:bodyPr wrap="square" lIns="0" rIns="0" tIns="0" bIns="0" anchor="ctr">
+            <a:spAutoFit/>
+          </a:bodyPr>
+          <a:lstStyle/>
+          <a:p>
+            <a:pPr algn="l">
+              <a:lnSpc>
+                <a:spcPct val="104000"/>
+              </a:lnSpc>
+              <a:spcAft>
+                <a:spcPts val="0"/>
+              </a:spcAft>
+            </a:pPr>
+            <a:r>
+              <a:rPr sz="1250" b="1" i="0">
+                <a:solidFill>
+                  <a:srgbClr val="141B2E"/>
+                </a:solidFill>
+                <a:latin typeface="Arial"/>
+              </a:rPr>
+              <a:t>26 с</a:t>
+            </a:r>
+          </a:p>
+        </p:txBody>
+      </p:sp>
+      <p:sp>
+        <p:nvSpPr>
+          <p:cNvPr id="28" name="TextBox 27"/>
+          <p:cNvSpPr txBox="1"/>
+          <p:nvPr/>
+        </p:nvSpPr>
+        <p:spPr>
+          <a:xfrm>
+            <a:off x="6406717" y="4701427"/>
+            <a:ext cx="2328166" cy="265684"/>
+          </a:xfrm>
+          <a:prstGeom prst="rect">
+            <a:avLst/>
+          </a:prstGeom>
+          <a:noFill/>
+        </p:spPr>
+        <p:txBody>
+          <a:bodyPr wrap="square" lIns="0" rIns="0" tIns="0" bIns="0" anchor="ctr">
+            <a:spAutoFit/>
+          </a:bodyPr>
+          <a:lstStyle/>
+          <a:p>
+            <a:pPr algn="l">
+              <a:lnSpc>
+                <a:spcPct val="104000"/>
+              </a:lnSpc>
+              <a:spcAft>
+                <a:spcPts val="0"/>
+              </a:spcAft>
+            </a:pPr>
+            <a:r>
+              <a:rPr sz="1250" b="1" i="0">
+                <a:solidFill>
+                  <a:srgbClr val="141B2E"/>
+                </a:solidFill>
+                <a:latin typeface="Arial"/>
+              </a:rPr>
+              <a:t>51 с</a:t>
+            </a:r>
+          </a:p>
+        </p:txBody>
+      </p:sp>
+      <p:sp>
+        <p:nvSpPr>
+          <p:cNvPr id="29" name="TextBox 28"/>
+          <p:cNvSpPr txBox="1"/>
+          <p:nvPr/>
+        </p:nvSpPr>
+        <p:spPr>
+          <a:xfrm>
+            <a:off x="8881188" y="4701427"/>
+            <a:ext cx="2530523" cy="265684"/>
+          </a:xfrm>
+          <a:prstGeom prst="rect">
+            <a:avLst/>
+          </a:prstGeom>
+          <a:noFill/>
+        </p:spPr>
+        <p:txBody>
+          <a:bodyPr wrap="square" lIns="0" rIns="0" tIns="0" bIns="0" anchor="ctr">
+            <a:spAutoFit/>
+          </a:bodyPr>
+          <a:lstStyle/>
+          <a:p>
+            <a:pPr algn="l">
+              <a:lnSpc>
+                <a:spcPct val="104000"/>
+              </a:lnSpc>
+              <a:spcAft>
+                <a:spcPts val="0"/>
+              </a:spcAft>
+            </a:pPr>
+            <a:r>
+              <a:rPr sz="1250" b="1" i="0">
+                <a:solidFill>
+                  <a:srgbClr val="141B2E"/>
+                </a:solidFill>
+                <a:latin typeface="Arial"/>
+              </a:rPr>
+              <a:t>измерено</a:t>
+            </a:r>
+          </a:p>
+        </p:txBody>
+      </p:sp>
+      <p:cxnSp>
+        <p:nvCxnSpPr>
+          <p:cNvPr id="30" name="Connector 29"/>
+          <p:cNvCxnSpPr/>
+          <p:nvPr/>
+        </p:nvCxnSpPr>
+        <p:spPr>
+          <a:xfrm>
+            <a:off x="630936" y="4967111"/>
+            <a:ext cx="10927080" cy="0"/>
+          </a:xfrm>
+          <a:prstGeom prst="line">
+            <a:avLst/>
+          </a:prstGeom>
+          <a:ln w="9525">
+            <a:solidFill>
+              <a:srgbClr val="E5EAF0"/>
+            </a:solidFill>
+          </a:ln>
+        </p:spPr>
+        <p:style>
+          <a:lnRef idx="2">
+            <a:schemeClr val="accent1"/>
+          </a:lnRef>
+          <a:fillRef idx="0">
+            <a:schemeClr val="accent1"/>
+          </a:fillRef>
+          <a:effectRef idx="1">
+            <a:schemeClr val="accent1"/>
+          </a:effectRef>
+          <a:fontRef idx="minor">
+            <a:schemeClr val="tx1"/>
+          </a:fontRef>
+        </p:style>
+      </p:cxnSp>
+      <p:sp>
+        <p:nvSpPr>
+          <p:cNvPr id="31" name="TextBox 30"/>
+          <p:cNvSpPr txBox="1"/>
+          <p:nvPr/>
+        </p:nvSpPr>
+        <p:spPr>
+          <a:xfrm>
+            <a:off x="630936" y="4967111"/>
+            <a:ext cx="3155006" cy="265684"/>
+          </a:xfrm>
+          <a:prstGeom prst="rect">
+            <a:avLst/>
+          </a:prstGeom>
+          <a:noFill/>
+        </p:spPr>
+        <p:txBody>
+          <a:bodyPr wrap="square" lIns="0" rIns="0" tIns="0" bIns="0" anchor="ctr">
+            <a:spAutoFit/>
+          </a:bodyPr>
+          <a:lstStyle/>
+          <a:p>
+            <a:pPr algn="l">
+              <a:lnSpc>
+                <a:spcPct val="104000"/>
+              </a:lnSpc>
+              <a:spcAft>
+                <a:spcPts val="0"/>
+              </a:spcAft>
+            </a:pPr>
+            <a:r>
+              <a:rPr sz="1250" b="0" i="0">
+                <a:solidFill>
+                  <a:srgbClr val="141B2E"/>
+                </a:solidFill>
+                <a:latin typeface="Arial"/>
+              </a:rPr>
+              <a:t>прогон тестов 60 с</a:t>
+            </a:r>
+          </a:p>
+        </p:txBody>
+      </p:sp>
+      <p:sp>
+        <p:nvSpPr>
+          <p:cNvPr id="32" name="TextBox 31"/>
+          <p:cNvSpPr txBox="1"/>
+          <p:nvPr/>
+        </p:nvSpPr>
+        <p:spPr>
+          <a:xfrm>
+            <a:off x="3932246" y="4967111"/>
+            <a:ext cx="2328166" cy="265684"/>
+          </a:xfrm>
+          <a:prstGeom prst="rect">
+            <a:avLst/>
+          </a:prstGeom>
+          <a:noFill/>
+        </p:spPr>
+        <p:txBody>
+          <a:bodyPr wrap="square" lIns="0" rIns="0" tIns="0" bIns="0" anchor="ctr">
+            <a:spAutoFit/>
+          </a:bodyPr>
+          <a:lstStyle/>
+          <a:p>
+            <a:pPr algn="l">
+              <a:lnSpc>
+                <a:spcPct val="104000"/>
+              </a:lnSpc>
+              <a:spcAft>
+                <a:spcPts val="0"/>
+              </a:spcAft>
+            </a:pPr>
+            <a:r>
+              <a:rPr sz="1250" b="0" i="0">
+                <a:solidFill>
+                  <a:srgbClr val="141B2E"/>
+                </a:solidFill>
+                <a:latin typeface="Arial"/>
+              </a:rPr>
+              <a:t>≈ 20 мин</a:t>
+            </a:r>
+          </a:p>
+        </p:txBody>
+      </p:sp>
+      <p:sp>
+        <p:nvSpPr>
+          <p:cNvPr id="33" name="TextBox 32"/>
+          <p:cNvSpPr txBox="1"/>
+          <p:nvPr/>
+        </p:nvSpPr>
+        <p:spPr>
+          <a:xfrm>
+            <a:off x="6406717" y="4967111"/>
+            <a:ext cx="2328166" cy="265684"/>
+          </a:xfrm>
+          <a:prstGeom prst="rect">
+            <a:avLst/>
+          </a:prstGeom>
+          <a:noFill/>
+        </p:spPr>
+        <p:txBody>
+          <a:bodyPr wrap="square" lIns="0" rIns="0" tIns="0" bIns="0" anchor="ctr">
+            <a:spAutoFit/>
+          </a:bodyPr>
+          <a:lstStyle/>
+          <a:p>
+            <a:pPr algn="l">
+              <a:lnSpc>
+                <a:spcPct val="104000"/>
+              </a:lnSpc>
+              <a:spcAft>
+                <a:spcPts val="0"/>
+              </a:spcAft>
+            </a:pPr>
+            <a:r>
+              <a:rPr sz="1250" b="0" i="0">
+                <a:solidFill>
+                  <a:srgbClr val="141B2E"/>
+                </a:solidFill>
+                <a:latin typeface="Arial"/>
+              </a:rPr>
+              <a:t>≈ 40 мин</a:t>
+            </a:r>
+          </a:p>
+        </p:txBody>
+      </p:sp>
+      <p:sp>
+        <p:nvSpPr>
+          <p:cNvPr id="34" name="TextBox 33"/>
+          <p:cNvSpPr txBox="1"/>
+          <p:nvPr/>
+        </p:nvSpPr>
+        <p:spPr>
+          <a:xfrm>
+            <a:off x="8881188" y="4967111"/>
+            <a:ext cx="2530523" cy="265684"/>
+          </a:xfrm>
+          <a:prstGeom prst="rect">
+            <a:avLst/>
+          </a:prstGeom>
+          <a:noFill/>
+        </p:spPr>
+        <p:txBody>
+          <a:bodyPr wrap="square" lIns="0" rIns="0" tIns="0" bIns="0" anchor="ctr">
+            <a:spAutoFit/>
+          </a:bodyPr>
+          <a:lstStyle/>
+          <a:p>
+            <a:pPr algn="l">
+              <a:lnSpc>
+                <a:spcPct val="104000"/>
+              </a:lnSpc>
+              <a:spcAft>
+                <a:spcPts val="0"/>
+              </a:spcAft>
+            </a:pPr>
+            <a:r>
+              <a:rPr sz="1250" b="0" i="0">
+                <a:solidFill>
+                  <a:srgbClr val="141B2E"/>
+                </a:solidFill>
+                <a:latin typeface="Arial"/>
+              </a:rPr>
+              <a:t>арифметика</a:t>
+            </a:r>
+          </a:p>
+        </p:txBody>
+      </p:sp>
+      <p:cxnSp>
+        <p:nvCxnSpPr>
+          <p:cNvPr id="35" name="Connector 34"/>
+          <p:cNvCxnSpPr/>
+          <p:nvPr/>
+        </p:nvCxnSpPr>
+        <p:spPr>
+          <a:xfrm>
+            <a:off x="630936" y="5232795"/>
+            <a:ext cx="10927080" cy="0"/>
+          </a:xfrm>
+          <a:prstGeom prst="line">
+            <a:avLst/>
+          </a:prstGeom>
+          <a:ln w="9525">
+            <a:solidFill>
+              <a:srgbClr val="E5EAF0"/>
+            </a:solidFill>
+          </a:ln>
+        </p:spPr>
+        <p:style>
+          <a:lnRef idx="2">
+            <a:schemeClr val="accent1"/>
+          </a:lnRef>
+          <a:fillRef idx="0">
+            <a:schemeClr val="accent1"/>
+          </a:fillRef>
+          <a:effectRef idx="1">
+            <a:schemeClr val="accent1"/>
+          </a:effectRef>
+          <a:fontRef idx="minor">
+            <a:schemeClr val="tx1"/>
+          </a:fontRef>
+        </p:style>
+      </p:cxnSp>
+      <p:sp>
+        <p:nvSpPr>
+          <p:cNvPr id="36" name="TextBox 35"/>
+          <p:cNvSpPr txBox="1"/>
+          <p:nvPr/>
+        </p:nvSpPr>
+        <p:spPr>
+          <a:xfrm>
+            <a:off x="630936" y="5232795"/>
+            <a:ext cx="3155006" cy="265684"/>
+          </a:xfrm>
+          <a:prstGeom prst="rect">
+            <a:avLst/>
+          </a:prstGeom>
+          <a:noFill/>
+        </p:spPr>
+        <p:txBody>
+          <a:bodyPr wrap="square" lIns="0" rIns="0" tIns="0" bIns="0" anchor="ctr">
+            <a:spAutoFit/>
+          </a:bodyPr>
+          <a:lstStyle/>
+          <a:p>
+            <a:pPr algn="l">
+              <a:lnSpc>
+                <a:spcPct val="104000"/>
+              </a:lnSpc>
+              <a:spcAft>
+                <a:spcPts val="0"/>
+              </a:spcAft>
+            </a:pPr>
+            <a:r>
+              <a:rPr sz="1250" b="0" i="0">
+                <a:solidFill>
+                  <a:srgbClr val="141B2E"/>
+                </a:solidFill>
+                <a:latin typeface="Arial"/>
+              </a:rPr>
+              <a:t>то же, и хуков </a:t>
+            </a:r>
+            <a:r>
+              <a:rPr sz="1250" b="1" i="0">
+                <a:solidFill>
+                  <a:srgbClr val="141B2E"/>
+                </a:solidFill>
+                <a:latin typeface="Arial"/>
+              </a:rPr>
+              <a:t>два</a:t>
+            </a:r>
+          </a:p>
+        </p:txBody>
+      </p:sp>
+      <p:sp>
+        <p:nvSpPr>
+          <p:cNvPr id="37" name="TextBox 36"/>
+          <p:cNvSpPr txBox="1"/>
+          <p:nvPr/>
+        </p:nvSpPr>
+        <p:spPr>
+          <a:xfrm>
+            <a:off x="3932246" y="5232795"/>
+            <a:ext cx="2328166" cy="265684"/>
+          </a:xfrm>
+          <a:prstGeom prst="rect">
+            <a:avLst/>
+          </a:prstGeom>
+          <a:noFill/>
+        </p:spPr>
+        <p:txBody>
+          <a:bodyPr wrap="square" lIns="0" rIns="0" tIns="0" bIns="0" anchor="ctr">
+            <a:spAutoFit/>
+          </a:bodyPr>
+          <a:lstStyle/>
+          <a:p>
+            <a:pPr algn="l">
+              <a:lnSpc>
+                <a:spcPct val="104000"/>
+              </a:lnSpc>
+              <a:spcAft>
+                <a:spcPts val="0"/>
+              </a:spcAft>
+            </a:pPr>
+            <a:r>
+              <a:rPr sz="1250" b="0" i="0">
+                <a:solidFill>
+                  <a:srgbClr val="141B2E"/>
+                </a:solidFill>
+                <a:latin typeface="Arial"/>
+              </a:rPr>
+              <a:t>≈ 40 мин</a:t>
+            </a:r>
+          </a:p>
+        </p:txBody>
+      </p:sp>
+      <p:sp>
+        <p:nvSpPr>
+          <p:cNvPr id="38" name="TextBox 37"/>
+          <p:cNvSpPr txBox="1"/>
+          <p:nvPr/>
+        </p:nvSpPr>
+        <p:spPr>
+          <a:xfrm>
+            <a:off x="6406717" y="5232795"/>
+            <a:ext cx="2328166" cy="265684"/>
+          </a:xfrm>
+          <a:prstGeom prst="rect">
+            <a:avLst/>
+          </a:prstGeom>
+          <a:noFill/>
+        </p:spPr>
+        <p:txBody>
+          <a:bodyPr wrap="square" lIns="0" rIns="0" tIns="0" bIns="0" anchor="ctr">
+            <a:spAutoFit/>
+          </a:bodyPr>
+          <a:lstStyle/>
+          <a:p>
+            <a:pPr algn="l">
+              <a:lnSpc>
+                <a:spcPct val="104000"/>
+              </a:lnSpc>
+              <a:spcAft>
+                <a:spcPts val="0"/>
+              </a:spcAft>
+            </a:pPr>
+            <a:r>
+              <a:rPr sz="1250" b="0" i="0">
+                <a:solidFill>
+                  <a:srgbClr val="141B2E"/>
+                </a:solidFill>
+                <a:latin typeface="Arial"/>
+              </a:rPr>
+              <a:t>≈ </a:t>
+            </a:r>
+            <a:r>
+              <a:rPr sz="1250" b="1" i="0">
+                <a:solidFill>
+                  <a:srgbClr val="141B2E"/>
+                </a:solidFill>
+                <a:latin typeface="Arial"/>
+              </a:rPr>
+              <a:t>80 мин</a:t>
+            </a:r>
+          </a:p>
+        </p:txBody>
+      </p:sp>
+      <p:sp>
+        <p:nvSpPr>
+          <p:cNvPr id="39" name="TextBox 38"/>
+          <p:cNvSpPr txBox="1"/>
+          <p:nvPr/>
+        </p:nvSpPr>
+        <p:spPr>
+          <a:xfrm>
+            <a:off x="8881188" y="5232795"/>
+            <a:ext cx="2530523" cy="265684"/>
+          </a:xfrm>
+          <a:prstGeom prst="rect">
+            <a:avLst/>
+          </a:prstGeom>
+          <a:noFill/>
+        </p:spPr>
+        <p:txBody>
+          <a:bodyPr wrap="square" lIns="0" rIns="0" tIns="0" bIns="0" anchor="ctr">
+            <a:spAutoFit/>
+          </a:bodyPr>
+          <a:lstStyle/>
+          <a:p>
+            <a:pPr algn="l">
+              <a:lnSpc>
+                <a:spcPct val="104000"/>
+              </a:lnSpc>
+              <a:spcAft>
+                <a:spcPts val="0"/>
+              </a:spcAft>
+            </a:pPr>
+            <a:r>
+              <a:rPr sz="1250" b="0" i="0">
+                <a:solidFill>
+                  <a:srgbClr val="141B2E"/>
+                </a:solidFill>
+                <a:latin typeface="Arial"/>
+              </a:rPr>
+              <a:t>арифметика</a:t>
+            </a:r>
+          </a:p>
+        </p:txBody>
+      </p:sp>
+      <p:sp>
+        <p:nvSpPr>
+          <p:cNvPr id="40" name="Rounded Rectangle 39"/>
+          <p:cNvSpPr/>
+          <p:nvPr/>
+        </p:nvSpPr>
+        <p:spPr>
+          <a:xfrm>
+            <a:off x="502920" y="5791087"/>
             <a:ext cx="11183112" cy="454152"/>
           </a:xfrm>
           <a:prstGeom prst="roundRect">
@@ -21612,13 +22686,13 @@
       </p:sp>
       <p:sp>
         <p:nvSpPr>
-          <p:cNvPr id="6" name="TextBox 5"/>
-          <p:cNvSpPr txBox="1"/>
-          <p:nvPr/>
-        </p:nvSpPr>
-        <p:spPr>
-          <a:xfrm>
-            <a:off x="740664" y="3024203"/>
+          <p:cNvPr id="41" name="TextBox 40"/>
+          <p:cNvSpPr txBox="1"/>
+          <p:nvPr/>
+        </p:nvSpPr>
+        <p:spPr>
+          <a:xfrm>
+            <a:off x="740664" y="5928247"/>
             <a:ext cx="10707624" cy="179832"/>
           </a:xfrm>
           <a:prstGeom prst="rect">
@@ -21641,1633 +22715,22 @@
               </a:spcAft>
             </a:pPr>
             <a:r>
+              <a:rPr sz="1200" b="0" i="1">
+                <a:solidFill>
+                  <a:srgbClr val="6B7685"/>
+                </a:solidFill>
+                <a:latin typeface="Arial"/>
+              </a:rPr>
+              <a:t>Верхняя таблица измерена на настоящем проекте. </a:t>
+            </a:r>
+            <a:r>
               <a:rPr sz="1200" b="1" i="1">
                 <a:solidFill>
                   <a:srgbClr val="6B7685"/>
                 </a:solidFill>
                 <a:latin typeface="Arial"/>
               </a:rPr>
-              <a:t>Цена одного срабатывания</a:t>
-            </a:r>
-            <a:r>
-              <a:rPr sz="1200" b="0" i="1">
-                <a:solidFill>
-                  <a:srgbClr val="6B7685"/>
-                </a:solidFill>
-                <a:latin typeface="Arial"/>
-              </a:rPr>
-              <a:t> — измерено на настоящем проекте, с его собственными проверками.</a:t>
-            </a:r>
-          </a:p>
-        </p:txBody>
-      </p:sp>
-      <p:sp>
-        <p:nvSpPr>
-          <p:cNvPr id="7" name="Rounded Rectangle 6"/>
-          <p:cNvSpPr/>
-          <p:nvPr/>
-        </p:nvSpPr>
-        <p:spPr>
-          <a:xfrm>
-            <a:off x="502920" y="3505787"/>
-            <a:ext cx="11183112" cy="1213866"/>
-          </a:xfrm>
-          <a:prstGeom prst="roundRect">
-            <a:avLst>
-              <a:gd name="adj" fmla="val 25000"/>
-            </a:avLst>
-          </a:prstGeom>
-          <a:solidFill>
-            <a:srgbClr val="FFFFFF"/>
-          </a:solidFill>
-          <a:ln w="17780">
-            <a:solidFill>
-              <a:srgbClr val="065A82"/>
-            </a:solidFill>
-          </a:ln>
-          <a:effectLst/>
-        </p:spPr>
-        <p:style>
-          <a:lnRef idx="1">
-            <a:schemeClr val="accent1"/>
-          </a:lnRef>
-          <a:fillRef idx="3">
-            <a:schemeClr val="accent1"/>
-          </a:fillRef>
-          <a:effectRef idx="2">
-            <a:schemeClr val="accent1"/>
-          </a:effectRef>
-          <a:fontRef idx="minor">
-            <a:schemeClr val="lt1"/>
-          </a:fontRef>
-        </p:style>
-        <p:txBody>
-          <a:bodyPr rtlCol="0" anchor="ctr"/>
-          <a:lstStyle/>
-          <a:p>
-            <a:pPr algn="ctr"/>
-          </a:p>
-        </p:txBody>
-      </p:sp>
-      <p:sp>
-        <p:nvSpPr>
-          <p:cNvPr id="8" name="Rounded Rectangle 7"/>
-          <p:cNvSpPr/>
-          <p:nvPr/>
-        </p:nvSpPr>
-        <p:spPr>
-          <a:xfrm>
-            <a:off x="521208" y="3597227"/>
-            <a:ext cx="68580" cy="1030986"/>
-          </a:xfrm>
-          <a:prstGeom prst="roundRect">
-            <a:avLst>
-              <a:gd name="adj" fmla="val 50000"/>
-            </a:avLst>
-          </a:prstGeom>
-          <a:solidFill>
-            <a:srgbClr val="065A82"/>
-          </a:solidFill>
-          <a:ln>
-            <a:noFill/>
-          </a:ln>
-          <a:effectLst/>
-        </p:spPr>
-        <p:style>
-          <a:lnRef idx="1">
-            <a:schemeClr val="accent1"/>
-          </a:lnRef>
-          <a:fillRef idx="3">
-            <a:schemeClr val="accent1"/>
-          </a:fillRef>
-          <a:effectRef idx="2">
-            <a:schemeClr val="accent1"/>
-          </a:effectRef>
-          <a:fontRef idx="minor">
-            <a:schemeClr val="lt1"/>
-          </a:fontRef>
-        </p:style>
-        <p:txBody>
-          <a:bodyPr rtlCol="0" anchor="ctr"/>
-          <a:lstStyle/>
-          <a:p>
-            <a:pPr algn="ctr"/>
-          </a:p>
-        </p:txBody>
-      </p:sp>
-      <p:sp>
-        <p:nvSpPr>
-          <p:cNvPr id="9" name="TextBox 8"/>
-          <p:cNvSpPr txBox="1"/>
-          <p:nvPr/>
-        </p:nvSpPr>
-        <p:spPr>
-          <a:xfrm>
-            <a:off x="630936" y="3633803"/>
-            <a:ext cx="3157077" cy="244601"/>
-          </a:xfrm>
-          <a:prstGeom prst="rect">
-            <a:avLst/>
-          </a:prstGeom>
-          <a:noFill/>
-        </p:spPr>
-        <p:txBody>
-          <a:bodyPr wrap="square" lIns="0" rIns="0" tIns="0" bIns="0" anchor="t">
-            <a:spAutoFit/>
-          </a:bodyPr>
-          <a:lstStyle/>
-          <a:p>
-            <a:pPr algn="l">
-              <a:lnSpc>
-                <a:spcPct val="110000"/>
-              </a:lnSpc>
-              <a:spcAft>
-                <a:spcPts val="0"/>
-              </a:spcAft>
-            </a:pPr>
-            <a:r>
-              <a:rPr sz="900" b="1" i="0">
-                <a:solidFill>
-                  <a:srgbClr val="065A82"/>
-                </a:solidFill>
-                <a:latin typeface="Arial"/>
-              </a:rPr>
-              <a:t>ХУК</a:t>
-            </a:r>
-          </a:p>
-        </p:txBody>
-      </p:sp>
-      <p:sp>
-        <p:nvSpPr>
-          <p:cNvPr id="10" name="TextBox 9"/>
-          <p:cNvSpPr txBox="1"/>
-          <p:nvPr/>
-        </p:nvSpPr>
-        <p:spPr>
-          <a:xfrm>
-            <a:off x="3934317" y="3633803"/>
-            <a:ext cx="2271897" cy="244601"/>
-          </a:xfrm>
-          <a:prstGeom prst="rect">
-            <a:avLst/>
-          </a:prstGeom>
-          <a:noFill/>
-        </p:spPr>
-        <p:txBody>
-          <a:bodyPr wrap="square" lIns="0" rIns="0" tIns="0" bIns="0" anchor="t">
-            <a:spAutoFit/>
-          </a:bodyPr>
-          <a:lstStyle/>
-          <a:p>
-            <a:pPr algn="l">
-              <a:lnSpc>
-                <a:spcPct val="110000"/>
-              </a:lnSpc>
-              <a:spcAft>
-                <a:spcPts val="0"/>
-              </a:spcAft>
-            </a:pPr>
-            <a:r>
-              <a:rPr sz="900" b="1" i="0">
-                <a:solidFill>
-                  <a:srgbClr val="065A82"/>
-                </a:solidFill>
-                <a:latin typeface="Arial"/>
-              </a:rPr>
-              <a:t>МАТЧЕР</a:t>
-            </a:r>
-          </a:p>
-        </p:txBody>
-      </p:sp>
-      <p:sp>
-        <p:nvSpPr>
-          <p:cNvPr id="11" name="TextBox 10"/>
-          <p:cNvSpPr txBox="1"/>
-          <p:nvPr/>
-        </p:nvSpPr>
-        <p:spPr>
-          <a:xfrm>
-            <a:off x="6352519" y="3633803"/>
-            <a:ext cx="2311733" cy="244601"/>
-          </a:xfrm>
-          <a:prstGeom prst="rect">
-            <a:avLst/>
-          </a:prstGeom>
-          <a:noFill/>
-        </p:spPr>
-        <p:txBody>
-          <a:bodyPr wrap="square" lIns="0" rIns="0" tIns="0" bIns="0" anchor="t">
-            <a:spAutoFit/>
-          </a:bodyPr>
-          <a:lstStyle/>
-          <a:p>
-            <a:pPr algn="l">
-              <a:lnSpc>
-                <a:spcPct val="110000"/>
-              </a:lnSpc>
-              <a:spcAft>
-                <a:spcPts val="0"/>
-              </a:spcAft>
-            </a:pPr>
-            <a:r>
-              <a:rPr sz="900" b="1" i="0">
-                <a:solidFill>
-                  <a:srgbClr val="065A82"/>
-                </a:solidFill>
-                <a:latin typeface="Arial"/>
-              </a:rPr>
-              <a:t>ОДНО СРАБАТЫВАНИЕ</a:t>
-            </a:r>
-          </a:p>
-        </p:txBody>
-      </p:sp>
-      <p:sp>
-        <p:nvSpPr>
-          <p:cNvPr id="12" name="TextBox 11"/>
-          <p:cNvSpPr txBox="1"/>
-          <p:nvPr/>
-        </p:nvSpPr>
-        <p:spPr>
-          <a:xfrm>
-            <a:off x="8810557" y="3633803"/>
-            <a:ext cx="2601154" cy="244601"/>
-          </a:xfrm>
-          <a:prstGeom prst="rect">
-            <a:avLst/>
-          </a:prstGeom>
-          <a:noFill/>
-        </p:spPr>
-        <p:txBody>
-          <a:bodyPr wrap="square" lIns="0" rIns="0" tIns="0" bIns="0" anchor="t">
-            <a:spAutoFit/>
-          </a:bodyPr>
-          <a:lstStyle/>
-          <a:p>
-            <a:pPr algn="l">
-              <a:lnSpc>
-                <a:spcPct val="110000"/>
-              </a:lnSpc>
-              <a:spcAft>
-                <a:spcPts val="0"/>
-              </a:spcAft>
-            </a:pPr>
-            <a:r>
-              <a:rPr sz="900" b="1" i="0">
-                <a:solidFill>
-                  <a:srgbClr val="065A82"/>
-                </a:solidFill>
-                <a:latin typeface="Arial"/>
-              </a:rPr>
-              <a:t>СРАБАТЫВАНИЙ ЗА ЗАДАЧУ</a:t>
-            </a:r>
-          </a:p>
-        </p:txBody>
-      </p:sp>
-      <p:sp>
-        <p:nvSpPr>
-          <p:cNvPr id="13" name="TextBox 12"/>
-          <p:cNvSpPr txBox="1"/>
-          <p:nvPr/>
-        </p:nvSpPr>
-        <p:spPr>
-          <a:xfrm>
-            <a:off x="630936" y="3878405"/>
-            <a:ext cx="3157077" cy="237744"/>
-          </a:xfrm>
-          <a:prstGeom prst="rect">
-            <a:avLst/>
-          </a:prstGeom>
-          <a:noFill/>
-        </p:spPr>
-        <p:txBody>
-          <a:bodyPr wrap="square" lIns="0" rIns="0" tIns="0" bIns="0" anchor="ctr">
-            <a:spAutoFit/>
-          </a:bodyPr>
-          <a:lstStyle/>
-          <a:p>
-            <a:pPr algn="l">
-              <a:lnSpc>
-                <a:spcPct val="104000"/>
-              </a:lnSpc>
-              <a:spcAft>
-                <a:spcPts val="0"/>
-              </a:spcAft>
-            </a:pPr>
-            <a:r>
-              <a:rPr sz="900" b="1" i="0">
-                <a:solidFill>
-                  <a:srgbClr val="141B2E"/>
-                </a:solidFill>
-                <a:latin typeface="Arial"/>
-              </a:rPr>
-              <a:t>наш барьер ветки</a:t>
-            </a:r>
-          </a:p>
-        </p:txBody>
-      </p:sp>
-      <p:sp>
-        <p:nvSpPr>
-          <p:cNvPr id="14" name="TextBox 13"/>
-          <p:cNvSpPr txBox="1"/>
-          <p:nvPr/>
-        </p:nvSpPr>
-        <p:spPr>
-          <a:xfrm>
-            <a:off x="3934317" y="3878405"/>
-            <a:ext cx="2271897" cy="237744"/>
-          </a:xfrm>
-          <a:prstGeom prst="rect">
-            <a:avLst/>
-          </a:prstGeom>
-          <a:noFill/>
-        </p:spPr>
-        <p:txBody>
-          <a:bodyPr wrap="square" lIns="0" rIns="0" tIns="0" bIns="0" anchor="ctr">
-            <a:spAutoFit/>
-          </a:bodyPr>
-          <a:lstStyle/>
-          <a:p>
-            <a:pPr algn="l">
-              <a:lnSpc>
-                <a:spcPct val="104000"/>
-              </a:lnSpc>
-              <a:spcAft>
-                <a:spcPts val="0"/>
-              </a:spcAft>
-            </a:pPr>
-            <a:r>
-              <a:rPr sz="900" b="0" i="0">
-                <a:solidFill>
-                  <a:srgbClr val="141B2E"/>
-                </a:solidFill>
-                <a:latin typeface="Consolas"/>
-              </a:rPr>
-              <a:t>Bash</a:t>
-            </a:r>
-            <a:r>
-              <a:rPr sz="900" b="0" i="0">
-                <a:solidFill>
-                  <a:srgbClr val="141B2E"/>
-                </a:solidFill>
-                <a:latin typeface="Arial"/>
-              </a:rPr>
-              <a:t> + </a:t>
-            </a:r>
-            <a:r>
-              <a:rPr sz="900" b="0" i="0">
-                <a:solidFill>
-                  <a:srgbClr val="141B2E"/>
-                </a:solidFill>
-                <a:latin typeface="Consolas"/>
-              </a:rPr>
-              <a:t>git commit</a:t>
-            </a:r>
-          </a:p>
-        </p:txBody>
-      </p:sp>
-      <p:sp>
-        <p:nvSpPr>
-          <p:cNvPr id="15" name="TextBox 14"/>
-          <p:cNvSpPr txBox="1"/>
-          <p:nvPr/>
-        </p:nvSpPr>
-        <p:spPr>
-          <a:xfrm>
-            <a:off x="6352519" y="3878405"/>
-            <a:ext cx="2311733" cy="237744"/>
-          </a:xfrm>
-          <a:prstGeom prst="rect">
-            <a:avLst/>
-          </a:prstGeom>
-          <a:noFill/>
-        </p:spPr>
-        <p:txBody>
-          <a:bodyPr wrap="square" lIns="0" rIns="0" tIns="0" bIns="0" anchor="ctr">
-            <a:spAutoFit/>
-          </a:bodyPr>
-          <a:lstStyle/>
-          <a:p>
-            <a:pPr algn="l">
-              <a:lnSpc>
-                <a:spcPct val="104000"/>
-              </a:lnSpc>
-              <a:spcAft>
-                <a:spcPts val="0"/>
-              </a:spcAft>
-            </a:pPr>
-            <a:r>
-              <a:rPr sz="900" b="1" i="0">
-                <a:solidFill>
-                  <a:srgbClr val="141B2E"/>
-                </a:solidFill>
-                <a:latin typeface="Arial"/>
-              </a:rPr>
-              <a:t>27 мс</a:t>
-            </a:r>
-          </a:p>
-        </p:txBody>
-      </p:sp>
-      <p:sp>
-        <p:nvSpPr>
-          <p:cNvPr id="16" name="TextBox 15"/>
-          <p:cNvSpPr txBox="1"/>
-          <p:nvPr/>
-        </p:nvSpPr>
-        <p:spPr>
-          <a:xfrm>
-            <a:off x="8810557" y="3878405"/>
-            <a:ext cx="2601154" cy="237744"/>
-          </a:xfrm>
-          <a:prstGeom prst="rect">
-            <a:avLst/>
-          </a:prstGeom>
-          <a:noFill/>
-        </p:spPr>
-        <p:txBody>
-          <a:bodyPr wrap="square" lIns="0" rIns="0" tIns="0" bIns="0" anchor="ctr">
-            <a:spAutoFit/>
-          </a:bodyPr>
-          <a:lstStyle/>
-          <a:p>
-            <a:pPr algn="l">
-              <a:lnSpc>
-                <a:spcPct val="104000"/>
-              </a:lnSpc>
-              <a:spcAft>
-                <a:spcPts val="0"/>
-              </a:spcAft>
-            </a:pPr>
-            <a:r>
-              <a:rPr sz="900" b="1" i="0">
-                <a:solidFill>
-                  <a:srgbClr val="141B2E"/>
-                </a:solidFill>
-                <a:latin typeface="Arial"/>
-              </a:rPr>
-              <a:t>1</a:t>
-            </a:r>
-          </a:p>
-        </p:txBody>
-      </p:sp>
-      <p:cxnSp>
-        <p:nvCxnSpPr>
-          <p:cNvPr id="17" name="Connector 16"/>
-          <p:cNvCxnSpPr/>
-          <p:nvPr/>
-        </p:nvCxnSpPr>
-        <p:spPr>
-          <a:xfrm>
-            <a:off x="630936" y="4116149"/>
-            <a:ext cx="10927080" cy="0"/>
-          </a:xfrm>
-          <a:prstGeom prst="line">
-            <a:avLst/>
-          </a:prstGeom>
-          <a:ln w="9525">
-            <a:solidFill>
-              <a:srgbClr val="E5EAF0"/>
-            </a:solidFill>
-          </a:ln>
-        </p:spPr>
-        <p:style>
-          <a:lnRef idx="2">
-            <a:schemeClr val="accent1"/>
-          </a:lnRef>
-          <a:fillRef idx="0">
-            <a:schemeClr val="accent1"/>
-          </a:fillRef>
-          <a:effectRef idx="1">
-            <a:schemeClr val="accent1"/>
-          </a:effectRef>
-          <a:fontRef idx="minor">
-            <a:schemeClr val="tx1"/>
-          </a:fontRef>
-        </p:style>
-      </p:cxnSp>
-      <p:sp>
-        <p:nvSpPr>
-          <p:cNvPr id="18" name="TextBox 17"/>
-          <p:cNvSpPr txBox="1"/>
-          <p:nvPr/>
-        </p:nvSpPr>
-        <p:spPr>
-          <a:xfrm>
-            <a:off x="630936" y="4116149"/>
-            <a:ext cx="3157077" cy="237744"/>
-          </a:xfrm>
-          <a:prstGeom prst="rect">
-            <a:avLst/>
-          </a:prstGeom>
-          <a:noFill/>
-        </p:spPr>
-        <p:txBody>
-          <a:bodyPr wrap="square" lIns="0" rIns="0" tIns="0" bIns="0" anchor="ctr">
-            <a:spAutoFit/>
-          </a:bodyPr>
-          <a:lstStyle/>
-          <a:p>
-            <a:pPr algn="l">
-              <a:lnSpc>
-                <a:spcPct val="104000"/>
-              </a:lnSpc>
-              <a:spcAft>
-                <a:spcPts val="0"/>
-              </a:spcAft>
-            </a:pPr>
-            <a:r>
-              <a:rPr sz="900" b="0" i="0">
-                <a:solidFill>
-                  <a:srgbClr val="141B2E"/>
-                </a:solidFill>
-                <a:latin typeface="Arial"/>
-              </a:rPr>
-              <a:t>синтаксическая проверка файлов</a:t>
-            </a:r>
-          </a:p>
-        </p:txBody>
-      </p:sp>
-      <p:sp>
-        <p:nvSpPr>
-          <p:cNvPr id="19" name="TextBox 18"/>
-          <p:cNvSpPr txBox="1"/>
-          <p:nvPr/>
-        </p:nvSpPr>
-        <p:spPr>
-          <a:xfrm>
-            <a:off x="3934317" y="4116149"/>
-            <a:ext cx="2271897" cy="237744"/>
-          </a:xfrm>
-          <a:prstGeom prst="rect">
-            <a:avLst/>
-          </a:prstGeom>
-          <a:noFill/>
-        </p:spPr>
-        <p:txBody>
-          <a:bodyPr wrap="square" lIns="0" rIns="0" tIns="0" bIns="0" anchor="ctr">
-            <a:spAutoFit/>
-          </a:bodyPr>
-          <a:lstStyle/>
-          <a:p>
-            <a:pPr algn="l">
-              <a:lnSpc>
-                <a:spcPct val="104000"/>
-              </a:lnSpc>
-              <a:spcAft>
-                <a:spcPts val="0"/>
-              </a:spcAft>
-            </a:pPr>
-            <a:r>
-              <a:rPr sz="900" b="0" i="0">
-                <a:solidFill>
-                  <a:srgbClr val="141B2E"/>
-                </a:solidFill>
-                <a:latin typeface="Consolas"/>
-              </a:rPr>
-              <a:t>Edit</a:t>
-            </a:r>
-            <a:r>
-              <a:rPr sz="900" b="0" i="0">
-                <a:solidFill>
-                  <a:srgbClr val="141B2E"/>
-                </a:solidFill>
-                <a:latin typeface="Arial"/>
-              </a:rPr>
-              <a:t> / </a:t>
-            </a:r>
-            <a:r>
-              <a:rPr sz="900" b="0" i="0">
-                <a:solidFill>
-                  <a:srgbClr val="141B2E"/>
-                </a:solidFill>
-                <a:latin typeface="Consolas"/>
-              </a:rPr>
-              <a:t>Write</a:t>
-            </a:r>
-          </a:p>
-        </p:txBody>
-      </p:sp>
-      <p:sp>
-        <p:nvSpPr>
-          <p:cNvPr id="20" name="TextBox 19"/>
-          <p:cNvSpPr txBox="1"/>
-          <p:nvPr/>
-        </p:nvSpPr>
-        <p:spPr>
-          <a:xfrm>
-            <a:off x="6352519" y="4116149"/>
-            <a:ext cx="2311733" cy="237744"/>
-          </a:xfrm>
-          <a:prstGeom prst="rect">
-            <a:avLst/>
-          </a:prstGeom>
-          <a:noFill/>
-        </p:spPr>
-        <p:txBody>
-          <a:bodyPr wrap="square" lIns="0" rIns="0" tIns="0" bIns="0" anchor="ctr">
-            <a:spAutoFit/>
-          </a:bodyPr>
-          <a:lstStyle/>
-          <a:p>
-            <a:pPr algn="l">
-              <a:lnSpc>
-                <a:spcPct val="104000"/>
-              </a:lnSpc>
-              <a:spcAft>
-                <a:spcPts val="0"/>
-              </a:spcAft>
-            </a:pPr>
-            <a:r>
-              <a:rPr sz="900" b="0" i="0">
-                <a:solidFill>
-                  <a:srgbClr val="141B2E"/>
-                </a:solidFill>
-                <a:latin typeface="Arial"/>
-              </a:rPr>
-              <a:t>124 мс</a:t>
-            </a:r>
-          </a:p>
-        </p:txBody>
-      </p:sp>
-      <p:sp>
-        <p:nvSpPr>
-          <p:cNvPr id="21" name="TextBox 20"/>
-          <p:cNvSpPr txBox="1"/>
-          <p:nvPr/>
-        </p:nvSpPr>
-        <p:spPr>
-          <a:xfrm>
-            <a:off x="8810557" y="4116149"/>
-            <a:ext cx="2601154" cy="237744"/>
-          </a:xfrm>
-          <a:prstGeom prst="rect">
-            <a:avLst/>
-          </a:prstGeom>
-          <a:noFill/>
-        </p:spPr>
-        <p:txBody>
-          <a:bodyPr wrap="square" lIns="0" rIns="0" tIns="0" bIns="0" anchor="ctr">
-            <a:spAutoFit/>
-          </a:bodyPr>
-          <a:lstStyle/>
-          <a:p>
-            <a:pPr algn="l">
-              <a:lnSpc>
-                <a:spcPct val="104000"/>
-              </a:lnSpc>
-              <a:spcAft>
-                <a:spcPts val="0"/>
-              </a:spcAft>
-            </a:pPr>
-            <a:r>
-              <a:rPr sz="900" b="1" i="0">
-                <a:solidFill>
-                  <a:srgbClr val="141B2E"/>
-                </a:solidFill>
-                <a:latin typeface="Arial"/>
-              </a:rPr>
-              <a:t>по числу правок</a:t>
-            </a:r>
-          </a:p>
-        </p:txBody>
-      </p:sp>
-      <p:cxnSp>
-        <p:nvCxnSpPr>
-          <p:cNvPr id="22" name="Connector 21"/>
-          <p:cNvCxnSpPr/>
-          <p:nvPr/>
-        </p:nvCxnSpPr>
-        <p:spPr>
-          <a:xfrm>
-            <a:off x="630936" y="4353893"/>
-            <a:ext cx="10927080" cy="0"/>
-          </a:xfrm>
-          <a:prstGeom prst="line">
-            <a:avLst/>
-          </a:prstGeom>
-          <a:ln w="9525">
-            <a:solidFill>
-              <a:srgbClr val="E5EAF0"/>
-            </a:solidFill>
-          </a:ln>
-        </p:spPr>
-        <p:style>
-          <a:lnRef idx="2">
-            <a:schemeClr val="accent1"/>
-          </a:lnRef>
-          <a:fillRef idx="0">
-            <a:schemeClr val="accent1"/>
-          </a:fillRef>
-          <a:effectRef idx="1">
-            <a:schemeClr val="accent1"/>
-          </a:effectRef>
-          <a:fontRef idx="minor">
-            <a:schemeClr val="tx1"/>
-          </a:fontRef>
-        </p:style>
-      </p:cxnSp>
-      <p:sp>
-        <p:nvSpPr>
-          <p:cNvPr id="23" name="TextBox 22"/>
-          <p:cNvSpPr txBox="1"/>
-          <p:nvPr/>
-        </p:nvSpPr>
-        <p:spPr>
-          <a:xfrm>
-            <a:off x="630936" y="4353893"/>
-            <a:ext cx="3157077" cy="237744"/>
-          </a:xfrm>
-          <a:prstGeom prst="rect">
-            <a:avLst/>
-          </a:prstGeom>
-          <a:noFill/>
-        </p:spPr>
-        <p:txBody>
-          <a:bodyPr wrap="square" lIns="0" rIns="0" tIns="0" bIns="0" anchor="ctr">
-            <a:spAutoFit/>
-          </a:bodyPr>
-          <a:lstStyle/>
-          <a:p>
-            <a:pPr algn="l">
-              <a:lnSpc>
-                <a:spcPct val="104000"/>
-              </a:lnSpc>
-              <a:spcAft>
-                <a:spcPts val="0"/>
-              </a:spcAft>
-            </a:pPr>
-            <a:r>
-              <a:rPr sz="900" b="0" i="0">
-                <a:solidFill>
-                  <a:srgbClr val="141B2E"/>
-                </a:solidFill>
-                <a:latin typeface="Arial"/>
-              </a:rPr>
-              <a:t>сборка проекта</a:t>
-            </a:r>
-          </a:p>
-        </p:txBody>
-      </p:sp>
-      <p:sp>
-        <p:nvSpPr>
-          <p:cNvPr id="24" name="TextBox 23"/>
-          <p:cNvSpPr txBox="1"/>
-          <p:nvPr/>
-        </p:nvSpPr>
-        <p:spPr>
-          <a:xfrm>
-            <a:off x="3934317" y="4353893"/>
-            <a:ext cx="2271897" cy="237744"/>
-          </a:xfrm>
-          <a:prstGeom prst="rect">
-            <a:avLst/>
-          </a:prstGeom>
-          <a:noFill/>
-        </p:spPr>
-        <p:txBody>
-          <a:bodyPr wrap="square" lIns="0" rIns="0" tIns="0" bIns="0" anchor="ctr">
-            <a:spAutoFit/>
-          </a:bodyPr>
-          <a:lstStyle/>
-          <a:p>
-            <a:pPr algn="l">
-              <a:lnSpc>
-                <a:spcPct val="104000"/>
-              </a:lnSpc>
-              <a:spcAft>
-                <a:spcPts val="0"/>
-              </a:spcAft>
-            </a:pPr>
-            <a:r>
-              <a:rPr sz="900" b="0" i="0">
-                <a:solidFill>
-                  <a:srgbClr val="141B2E"/>
-                </a:solidFill>
-                <a:latin typeface="Consolas"/>
-              </a:rPr>
-              <a:t>Edit</a:t>
-            </a:r>
-            <a:r>
-              <a:rPr sz="900" b="0" i="0">
-                <a:solidFill>
-                  <a:srgbClr val="141B2E"/>
-                </a:solidFill>
-                <a:latin typeface="Arial"/>
-              </a:rPr>
-              <a:t> / </a:t>
-            </a:r>
-            <a:r>
-              <a:rPr sz="900" b="0" i="0">
-                <a:solidFill>
-                  <a:srgbClr val="141B2E"/>
-                </a:solidFill>
-                <a:latin typeface="Consolas"/>
-              </a:rPr>
-              <a:t>Write</a:t>
-            </a:r>
-          </a:p>
-        </p:txBody>
-      </p:sp>
-      <p:sp>
-        <p:nvSpPr>
-          <p:cNvPr id="25" name="TextBox 24"/>
-          <p:cNvSpPr txBox="1"/>
-          <p:nvPr/>
-        </p:nvSpPr>
-        <p:spPr>
-          <a:xfrm>
-            <a:off x="6352519" y="4353893"/>
-            <a:ext cx="2311733" cy="237744"/>
-          </a:xfrm>
-          <a:prstGeom prst="rect">
-            <a:avLst/>
-          </a:prstGeom>
-          <a:noFill/>
-        </p:spPr>
-        <p:txBody>
-          <a:bodyPr wrap="square" lIns="0" rIns="0" tIns="0" bIns="0" anchor="ctr">
-            <a:spAutoFit/>
-          </a:bodyPr>
-          <a:lstStyle/>
-          <a:p>
-            <a:pPr algn="l">
-              <a:lnSpc>
-                <a:spcPct val="104000"/>
-              </a:lnSpc>
-              <a:spcAft>
-                <a:spcPts val="0"/>
-              </a:spcAft>
-            </a:pPr>
-            <a:r>
-              <a:rPr sz="900" b="1" i="0">
-                <a:solidFill>
-                  <a:srgbClr val="141B2E"/>
-                </a:solidFill>
-                <a:latin typeface="Arial"/>
-              </a:rPr>
-              <a:t>1 137 мс</a:t>
-            </a:r>
-          </a:p>
-        </p:txBody>
-      </p:sp>
-      <p:sp>
-        <p:nvSpPr>
-          <p:cNvPr id="26" name="TextBox 25"/>
-          <p:cNvSpPr txBox="1"/>
-          <p:nvPr/>
-        </p:nvSpPr>
-        <p:spPr>
-          <a:xfrm>
-            <a:off x="8810557" y="4353893"/>
-            <a:ext cx="2601154" cy="237744"/>
-          </a:xfrm>
-          <a:prstGeom prst="rect">
-            <a:avLst/>
-          </a:prstGeom>
-          <a:noFill/>
-        </p:spPr>
-        <p:txBody>
-          <a:bodyPr wrap="square" lIns="0" rIns="0" tIns="0" bIns="0" anchor="ctr">
-            <a:spAutoFit/>
-          </a:bodyPr>
-          <a:lstStyle/>
-          <a:p>
-            <a:pPr algn="l">
-              <a:lnSpc>
-                <a:spcPct val="104000"/>
-              </a:lnSpc>
-              <a:spcAft>
-                <a:spcPts val="0"/>
-              </a:spcAft>
-            </a:pPr>
-            <a:r>
-              <a:rPr sz="900" b="1" i="0">
-                <a:solidFill>
-                  <a:srgbClr val="141B2E"/>
-                </a:solidFill>
-                <a:latin typeface="Arial"/>
-              </a:rPr>
-              <a:t>по числу правок</a:t>
-            </a:r>
-          </a:p>
-        </p:txBody>
-      </p:sp>
-      <p:sp>
-        <p:nvSpPr>
-          <p:cNvPr id="27" name="Rounded Rectangle 26"/>
-          <p:cNvSpPr/>
-          <p:nvPr/>
-        </p:nvSpPr>
-        <p:spPr>
-          <a:xfrm>
-            <a:off x="502920" y="4884245"/>
-            <a:ext cx="11183112" cy="457200"/>
-          </a:xfrm>
-          <a:prstGeom prst="roundRect">
-            <a:avLst>
-              <a:gd name="adj" fmla="val 25000"/>
-            </a:avLst>
-          </a:prstGeom>
-          <a:solidFill>
-            <a:srgbClr val="E4E9EF"/>
-          </a:solidFill>
-          <a:ln w="15240">
-            <a:solidFill>
-              <a:srgbClr val="6B7685"/>
-            </a:solidFill>
-            <a:prstDash val="dash"/>
-          </a:ln>
-          <a:effectLst/>
-        </p:spPr>
-        <p:style>
-          <a:lnRef idx="1">
-            <a:schemeClr val="accent1"/>
-          </a:lnRef>
-          <a:fillRef idx="3">
-            <a:schemeClr val="accent1"/>
-          </a:fillRef>
-          <a:effectRef idx="2">
-            <a:schemeClr val="accent1"/>
-          </a:effectRef>
-          <a:fontRef idx="minor">
-            <a:schemeClr val="lt1"/>
-          </a:fontRef>
-        </p:style>
-        <p:txBody>
-          <a:bodyPr rtlCol="0" anchor="ctr"/>
-          <a:lstStyle/>
-          <a:p>
-            <a:pPr algn="ctr"/>
-          </a:p>
-        </p:txBody>
-      </p:sp>
-      <p:sp>
-        <p:nvSpPr>
-          <p:cNvPr id="28" name="TextBox 27"/>
-          <p:cNvSpPr txBox="1"/>
-          <p:nvPr/>
-        </p:nvSpPr>
-        <p:spPr>
-          <a:xfrm>
-            <a:off x="740664" y="5021405"/>
-            <a:ext cx="10707624" cy="182880"/>
-          </a:xfrm>
-          <a:prstGeom prst="rect">
-            <a:avLst/>
-          </a:prstGeom>
-          <a:noFill/>
-        </p:spPr>
-        <p:txBody>
-          <a:bodyPr wrap="square" lIns="0" rIns="0" tIns="0" bIns="0" anchor="ctr">
-            <a:spAutoFit/>
-          </a:bodyPr>
-          <a:lstStyle/>
-          <a:p>
-            <a:pPr algn="l">
-              <a:lnSpc>
-                <a:spcPct val="118000"/>
-              </a:lnSpc>
-              <a:spcAft>
-                <a:spcPts val="300"/>
-              </a:spcAft>
-            </a:pPr>
-            <a:r>
-              <a:rPr sz="950" b="1" i="1">
-                <a:solidFill>
-                  <a:srgbClr val="6B7685"/>
-                </a:solidFill>
-                <a:latin typeface="Arial"/>
-              </a:rPr>
-              <a:t>Что выходит за задачу</a:t>
-            </a:r>
-            <a:r>
-              <a:rPr sz="950" b="0" i="1">
-                <a:solidFill>
-                  <a:srgbClr val="6B7685"/>
-                </a:solidFill>
-                <a:latin typeface="Arial"/>
-              </a:rPr>
-              <a:t> — измерено от начала до конца: 10 правок → </a:t>
-            </a:r>
-            <a:r>
-              <a:rPr sz="950" b="1" i="1">
-                <a:solidFill>
-                  <a:srgbClr val="6B7685"/>
-                </a:solidFill>
-                <a:latin typeface="Arial"/>
-              </a:rPr>
-              <a:t>12 с</a:t>
-            </a:r>
-            <a:r>
-              <a:rPr sz="950" b="0" i="1">
-                <a:solidFill>
-                  <a:srgbClr val="6B7685"/>
-                </a:solidFill>
-                <a:latin typeface="Arial"/>
-              </a:rPr>
-              <a:t> · 20 правок → </a:t>
-            </a:r>
-            <a:r>
-              <a:rPr sz="950" b="1" i="1">
-                <a:solidFill>
-                  <a:srgbClr val="6B7685"/>
-                </a:solidFill>
-                <a:latin typeface="Arial"/>
-              </a:rPr>
-              <a:t>26 с</a:t>
-            </a:r>
-            <a:r>
-              <a:rPr sz="950" b="0" i="1">
-                <a:solidFill>
-                  <a:srgbClr val="6B7685"/>
-                </a:solidFill>
-                <a:latin typeface="Arial"/>
-              </a:rPr>
-              <a:t> · 40 правок → </a:t>
-            </a:r>
-            <a:r>
-              <a:rPr sz="950" b="1" i="1">
-                <a:solidFill>
-                  <a:srgbClr val="6B7685"/>
-                </a:solidFill>
-                <a:latin typeface="Arial"/>
-              </a:rPr>
-              <a:t>51 с</a:t>
-            </a:r>
-            <a:r>
-              <a:rPr sz="950" b="0" i="1">
-                <a:solidFill>
-                  <a:srgbClr val="6B7685"/>
-                </a:solidFill>
-                <a:latin typeface="Arial"/>
-              </a:rPr>
-              <a:t>. И это </a:t>
-            </a:r>
-            <a:r>
-              <a:rPr sz="950" b="1" i="1">
-                <a:solidFill>
-                  <a:srgbClr val="6B7685"/>
-                </a:solidFill>
-                <a:latin typeface="Arial"/>
-              </a:rPr>
-              <a:t>самый дешёвый</a:t>
-            </a:r>
-            <a:r>
-              <a:rPr sz="950" b="0" i="1">
-                <a:solidFill>
-                  <a:srgbClr val="6B7685"/>
-                </a:solidFill>
-                <a:latin typeface="Arial"/>
-              </a:rPr>
-              <a:t> случай: проект на три файла, сборка чуть больше секунды.</a:t>
-            </a:r>
-          </a:p>
-        </p:txBody>
-      </p:sp>
-      <p:sp>
-        <p:nvSpPr>
-          <p:cNvPr id="29" name="Rounded Rectangle 28"/>
-          <p:cNvSpPr/>
-          <p:nvPr/>
-        </p:nvSpPr>
-        <p:spPr>
-          <a:xfrm>
-            <a:off x="502920" y="5506037"/>
-            <a:ext cx="11183112" cy="1451610"/>
-          </a:xfrm>
-          <a:prstGeom prst="roundRect">
-            <a:avLst>
-              <a:gd name="adj" fmla="val 20997"/>
-            </a:avLst>
-          </a:prstGeom>
-          <a:solidFill>
-            <a:srgbClr val="FFFFFF"/>
-          </a:solidFill>
-          <a:ln w="17780">
-            <a:solidFill>
-              <a:srgbClr val="065A82"/>
-            </a:solidFill>
-          </a:ln>
-          <a:effectLst/>
-        </p:spPr>
-        <p:style>
-          <a:lnRef idx="1">
-            <a:schemeClr val="accent1"/>
-          </a:lnRef>
-          <a:fillRef idx="3">
-            <a:schemeClr val="accent1"/>
-          </a:fillRef>
-          <a:effectRef idx="2">
-            <a:schemeClr val="accent1"/>
-          </a:effectRef>
-          <a:fontRef idx="minor">
-            <a:schemeClr val="lt1"/>
-          </a:fontRef>
-        </p:style>
-        <p:txBody>
-          <a:bodyPr rtlCol="0" anchor="ctr"/>
-          <a:lstStyle/>
-          <a:p>
-            <a:pPr algn="ctr"/>
-          </a:p>
-        </p:txBody>
-      </p:sp>
-      <p:sp>
-        <p:nvSpPr>
-          <p:cNvPr id="30" name="Rounded Rectangle 29"/>
-          <p:cNvSpPr/>
-          <p:nvPr/>
-        </p:nvSpPr>
-        <p:spPr>
-          <a:xfrm>
-            <a:off x="521208" y="5597477"/>
-            <a:ext cx="68580" cy="1268730"/>
-          </a:xfrm>
-          <a:prstGeom prst="roundRect">
-            <a:avLst>
-              <a:gd name="adj" fmla="val 50000"/>
-            </a:avLst>
-          </a:prstGeom>
-          <a:solidFill>
-            <a:srgbClr val="065A82"/>
-          </a:solidFill>
-          <a:ln>
-            <a:noFill/>
-          </a:ln>
-          <a:effectLst/>
-        </p:spPr>
-        <p:style>
-          <a:lnRef idx="1">
-            <a:schemeClr val="accent1"/>
-          </a:lnRef>
-          <a:fillRef idx="3">
-            <a:schemeClr val="accent1"/>
-          </a:fillRef>
-          <a:effectRef idx="2">
-            <a:schemeClr val="accent1"/>
-          </a:effectRef>
-          <a:fontRef idx="minor">
-            <a:schemeClr val="lt1"/>
-          </a:fontRef>
-        </p:style>
-        <p:txBody>
-          <a:bodyPr rtlCol="0" anchor="ctr"/>
-          <a:lstStyle/>
-          <a:p>
-            <a:pPr algn="ctr"/>
-          </a:p>
-        </p:txBody>
-      </p:sp>
-      <p:sp>
-        <p:nvSpPr>
-          <p:cNvPr id="31" name="TextBox 30"/>
-          <p:cNvSpPr txBox="1"/>
-          <p:nvPr/>
-        </p:nvSpPr>
-        <p:spPr>
-          <a:xfrm>
-            <a:off x="630936" y="5634053"/>
-            <a:ext cx="3078434" cy="244601"/>
-          </a:xfrm>
-          <a:prstGeom prst="rect">
-            <a:avLst/>
-          </a:prstGeom>
-          <a:noFill/>
-        </p:spPr>
-        <p:txBody>
-          <a:bodyPr wrap="square" lIns="0" rIns="0" tIns="0" bIns="0" anchor="t">
-            <a:spAutoFit/>
-          </a:bodyPr>
-          <a:lstStyle/>
-          <a:p>
-            <a:pPr algn="l">
-              <a:lnSpc>
-                <a:spcPct val="110000"/>
-              </a:lnSpc>
-              <a:spcAft>
-                <a:spcPts val="0"/>
-              </a:spcAft>
-            </a:pPr>
-            <a:r>
-              <a:rPr sz="900" b="1" i="0">
-                <a:solidFill>
-                  <a:srgbClr val="065A82"/>
-                </a:solidFill>
-                <a:latin typeface="Arial"/>
-              </a:rPr>
-              <a:t>ЦИКЛ ПРОВЕРОК</a:t>
-            </a:r>
-          </a:p>
-        </p:txBody>
-      </p:sp>
-      <p:sp>
-        <p:nvSpPr>
-          <p:cNvPr id="32" name="TextBox 31"/>
-          <p:cNvSpPr txBox="1"/>
-          <p:nvPr/>
-        </p:nvSpPr>
-        <p:spPr>
-          <a:xfrm>
-            <a:off x="3855674" y="5634053"/>
-            <a:ext cx="2372592" cy="244601"/>
-          </a:xfrm>
-          <a:prstGeom prst="rect">
-            <a:avLst/>
-          </a:prstGeom>
-          <a:noFill/>
-        </p:spPr>
-        <p:txBody>
-          <a:bodyPr wrap="square" lIns="0" rIns="0" tIns="0" bIns="0" anchor="t">
-            <a:spAutoFit/>
-          </a:bodyPr>
-          <a:lstStyle/>
-          <a:p>
-            <a:pPr algn="l">
-              <a:lnSpc>
-                <a:spcPct val="110000"/>
-              </a:lnSpc>
-              <a:spcAft>
-                <a:spcPts val="0"/>
-              </a:spcAft>
-            </a:pPr>
-            <a:r>
-              <a:rPr sz="900" b="1" i="0">
-                <a:solidFill>
-                  <a:srgbClr val="065A82"/>
-                </a:solidFill>
-                <a:latin typeface="Arial"/>
-              </a:rPr>
-              <a:t>20 ПРАВОК</a:t>
-            </a:r>
-          </a:p>
-        </p:txBody>
-      </p:sp>
-      <p:sp>
-        <p:nvSpPr>
-          <p:cNvPr id="33" name="TextBox 32"/>
-          <p:cNvSpPr txBox="1"/>
-          <p:nvPr/>
-        </p:nvSpPr>
-        <p:spPr>
-          <a:xfrm>
-            <a:off x="6374570" y="5634053"/>
-            <a:ext cx="2372592" cy="244601"/>
-          </a:xfrm>
-          <a:prstGeom prst="rect">
-            <a:avLst/>
-          </a:prstGeom>
-          <a:noFill/>
-        </p:spPr>
-        <p:txBody>
-          <a:bodyPr wrap="square" lIns="0" rIns="0" tIns="0" bIns="0" anchor="t">
-            <a:spAutoFit/>
-          </a:bodyPr>
-          <a:lstStyle/>
-          <a:p>
-            <a:pPr algn="l">
-              <a:lnSpc>
-                <a:spcPct val="110000"/>
-              </a:lnSpc>
-              <a:spcAft>
-                <a:spcPts val="0"/>
-              </a:spcAft>
-            </a:pPr>
-            <a:r>
-              <a:rPr sz="900" b="1" i="0">
-                <a:solidFill>
-                  <a:srgbClr val="065A82"/>
-                </a:solidFill>
-                <a:latin typeface="Arial"/>
-              </a:rPr>
-              <a:t>40 ПРАВОК</a:t>
-            </a:r>
-          </a:p>
-        </p:txBody>
-      </p:sp>
-      <p:sp>
-        <p:nvSpPr>
-          <p:cNvPr id="34" name="TextBox 33"/>
-          <p:cNvSpPr txBox="1"/>
-          <p:nvPr/>
-        </p:nvSpPr>
-        <p:spPr>
-          <a:xfrm>
-            <a:off x="8893466" y="5634053"/>
-            <a:ext cx="2518245" cy="244601"/>
-          </a:xfrm>
-          <a:prstGeom prst="rect">
-            <a:avLst/>
-          </a:prstGeom>
-          <a:noFill/>
-        </p:spPr>
-        <p:txBody>
-          <a:bodyPr wrap="square" lIns="0" rIns="0" tIns="0" bIns="0" anchor="t">
-            <a:spAutoFit/>
-          </a:bodyPr>
-          <a:lstStyle/>
-          <a:p>
-            <a:pPr algn="l">
-              <a:lnSpc>
-                <a:spcPct val="110000"/>
-              </a:lnSpc>
-              <a:spcAft>
-                <a:spcPts val="0"/>
-              </a:spcAft>
-            </a:pPr>
-            <a:r>
-              <a:rPr sz="900" b="1" i="0">
-                <a:solidFill>
-                  <a:srgbClr val="065A82"/>
-                </a:solidFill>
-                <a:latin typeface="Arial"/>
-              </a:rPr>
-              <a:t/>
-            </a:r>
-          </a:p>
-        </p:txBody>
-      </p:sp>
-      <p:sp>
-        <p:nvSpPr>
-          <p:cNvPr id="35" name="TextBox 34"/>
-          <p:cNvSpPr txBox="1"/>
-          <p:nvPr/>
-        </p:nvSpPr>
-        <p:spPr>
-          <a:xfrm>
-            <a:off x="630936" y="5878655"/>
-            <a:ext cx="3078434" cy="237744"/>
-          </a:xfrm>
-          <a:prstGeom prst="rect">
-            <a:avLst/>
-          </a:prstGeom>
-          <a:noFill/>
-        </p:spPr>
-        <p:txBody>
-          <a:bodyPr wrap="square" lIns="0" rIns="0" tIns="0" bIns="0" anchor="ctr">
-            <a:spAutoFit/>
-          </a:bodyPr>
-          <a:lstStyle/>
-          <a:p>
-            <a:pPr algn="l">
-              <a:lnSpc>
-                <a:spcPct val="104000"/>
-              </a:lnSpc>
-              <a:spcAft>
-                <a:spcPts val="0"/>
-              </a:spcAft>
-            </a:pPr>
-            <a:r>
-              <a:rPr sz="900" b="1" i="0">
-                <a:solidFill>
-                  <a:srgbClr val="141B2E"/>
-                </a:solidFill>
-                <a:latin typeface="Arial"/>
-              </a:rPr>
-              <a:t>синтаксис + сборка</a:t>
-            </a:r>
-          </a:p>
-        </p:txBody>
-      </p:sp>
-      <p:sp>
-        <p:nvSpPr>
-          <p:cNvPr id="36" name="TextBox 35"/>
-          <p:cNvSpPr txBox="1"/>
-          <p:nvPr/>
-        </p:nvSpPr>
-        <p:spPr>
-          <a:xfrm>
-            <a:off x="3855674" y="5878655"/>
-            <a:ext cx="2372592" cy="237744"/>
-          </a:xfrm>
-          <a:prstGeom prst="rect">
-            <a:avLst/>
-          </a:prstGeom>
-          <a:noFill/>
-        </p:spPr>
-        <p:txBody>
-          <a:bodyPr wrap="square" lIns="0" rIns="0" tIns="0" bIns="0" anchor="ctr">
-            <a:spAutoFit/>
-          </a:bodyPr>
-          <a:lstStyle/>
-          <a:p>
-            <a:pPr algn="l">
-              <a:lnSpc>
-                <a:spcPct val="104000"/>
-              </a:lnSpc>
-              <a:spcAft>
-                <a:spcPts val="0"/>
-              </a:spcAft>
-            </a:pPr>
-            <a:r>
-              <a:rPr sz="900" b="1" i="0">
-                <a:solidFill>
-                  <a:srgbClr val="141B2E"/>
-                </a:solidFill>
-                <a:latin typeface="Arial"/>
-              </a:rPr>
-              <a:t>26 с</a:t>
-            </a:r>
-          </a:p>
-        </p:txBody>
-      </p:sp>
-      <p:sp>
-        <p:nvSpPr>
-          <p:cNvPr id="37" name="TextBox 36"/>
-          <p:cNvSpPr txBox="1"/>
-          <p:nvPr/>
-        </p:nvSpPr>
-        <p:spPr>
-          <a:xfrm>
-            <a:off x="6374570" y="5878655"/>
-            <a:ext cx="2372592" cy="237744"/>
-          </a:xfrm>
-          <a:prstGeom prst="rect">
-            <a:avLst/>
-          </a:prstGeom>
-          <a:noFill/>
-        </p:spPr>
-        <p:txBody>
-          <a:bodyPr wrap="square" lIns="0" rIns="0" tIns="0" bIns="0" anchor="ctr">
-            <a:spAutoFit/>
-          </a:bodyPr>
-          <a:lstStyle/>
-          <a:p>
-            <a:pPr algn="l">
-              <a:lnSpc>
-                <a:spcPct val="104000"/>
-              </a:lnSpc>
-              <a:spcAft>
-                <a:spcPts val="0"/>
-              </a:spcAft>
-            </a:pPr>
-            <a:r>
-              <a:rPr sz="900" b="1" i="0">
-                <a:solidFill>
-                  <a:srgbClr val="141B2E"/>
-                </a:solidFill>
-                <a:latin typeface="Arial"/>
-              </a:rPr>
-              <a:t>51 с</a:t>
-            </a:r>
-          </a:p>
-        </p:txBody>
-      </p:sp>
-      <p:sp>
-        <p:nvSpPr>
-          <p:cNvPr id="38" name="TextBox 37"/>
-          <p:cNvSpPr txBox="1"/>
-          <p:nvPr/>
-        </p:nvSpPr>
-        <p:spPr>
-          <a:xfrm>
-            <a:off x="8893466" y="5878655"/>
-            <a:ext cx="2518245" cy="237744"/>
-          </a:xfrm>
-          <a:prstGeom prst="rect">
-            <a:avLst/>
-          </a:prstGeom>
-          <a:noFill/>
-        </p:spPr>
-        <p:txBody>
-          <a:bodyPr wrap="square" lIns="0" rIns="0" tIns="0" bIns="0" anchor="ctr">
-            <a:spAutoFit/>
-          </a:bodyPr>
-          <a:lstStyle/>
-          <a:p>
-            <a:pPr algn="l">
-              <a:lnSpc>
-                <a:spcPct val="104000"/>
-              </a:lnSpc>
-              <a:spcAft>
-                <a:spcPts val="0"/>
-              </a:spcAft>
-            </a:pPr>
-            <a:r>
-              <a:rPr sz="900" b="1" i="0">
-                <a:solidFill>
-                  <a:srgbClr val="141B2E"/>
-                </a:solidFill>
-                <a:latin typeface="Arial"/>
-              </a:rPr>
-              <a:t>измерено</a:t>
-            </a:r>
-          </a:p>
-        </p:txBody>
-      </p:sp>
-      <p:cxnSp>
-        <p:nvCxnSpPr>
-          <p:cNvPr id="39" name="Connector 38"/>
-          <p:cNvCxnSpPr/>
-          <p:nvPr/>
-        </p:nvCxnSpPr>
-        <p:spPr>
-          <a:xfrm>
-            <a:off x="630936" y="6116399"/>
-            <a:ext cx="10927080" cy="0"/>
-          </a:xfrm>
-          <a:prstGeom prst="line">
-            <a:avLst/>
-          </a:prstGeom>
-          <a:ln w="9525">
-            <a:solidFill>
-              <a:srgbClr val="E5EAF0"/>
-            </a:solidFill>
-          </a:ln>
-        </p:spPr>
-        <p:style>
-          <a:lnRef idx="2">
-            <a:schemeClr val="accent1"/>
-          </a:lnRef>
-          <a:fillRef idx="0">
-            <a:schemeClr val="accent1"/>
-          </a:fillRef>
-          <a:effectRef idx="1">
-            <a:schemeClr val="accent1"/>
-          </a:effectRef>
-          <a:fontRef idx="minor">
-            <a:schemeClr val="tx1"/>
-          </a:fontRef>
-        </p:style>
-      </p:cxnSp>
-      <p:sp>
-        <p:nvSpPr>
-          <p:cNvPr id="40" name="TextBox 39"/>
-          <p:cNvSpPr txBox="1"/>
-          <p:nvPr/>
-        </p:nvSpPr>
-        <p:spPr>
-          <a:xfrm>
-            <a:off x="630936" y="6116399"/>
-            <a:ext cx="3078434" cy="237744"/>
-          </a:xfrm>
-          <a:prstGeom prst="rect">
-            <a:avLst/>
-          </a:prstGeom>
-          <a:noFill/>
-        </p:spPr>
-        <p:txBody>
-          <a:bodyPr wrap="square" lIns="0" rIns="0" tIns="0" bIns="0" anchor="ctr">
-            <a:spAutoFit/>
-          </a:bodyPr>
-          <a:lstStyle/>
-          <a:p>
-            <a:pPr algn="l">
-              <a:lnSpc>
-                <a:spcPct val="104000"/>
-              </a:lnSpc>
-              <a:spcAft>
-                <a:spcPts val="0"/>
-              </a:spcAft>
-            </a:pPr>
-            <a:r>
-              <a:rPr sz="900" b="0" i="0">
-                <a:solidFill>
-                  <a:srgbClr val="141B2E"/>
-                </a:solidFill>
-                <a:latin typeface="Arial"/>
-              </a:rPr>
-              <a:t>+ прогон тестов, 12 с</a:t>
-            </a:r>
-          </a:p>
-        </p:txBody>
-      </p:sp>
-      <p:sp>
-        <p:nvSpPr>
-          <p:cNvPr id="41" name="TextBox 40"/>
-          <p:cNvSpPr txBox="1"/>
-          <p:nvPr/>
-        </p:nvSpPr>
-        <p:spPr>
-          <a:xfrm>
-            <a:off x="3855674" y="6116399"/>
-            <a:ext cx="2372592" cy="237744"/>
-          </a:xfrm>
-          <a:prstGeom prst="rect">
-            <a:avLst/>
-          </a:prstGeom>
-          <a:noFill/>
-        </p:spPr>
-        <p:txBody>
-          <a:bodyPr wrap="square" lIns="0" rIns="0" tIns="0" bIns="0" anchor="ctr">
-            <a:spAutoFit/>
-          </a:bodyPr>
-          <a:lstStyle/>
-          <a:p>
-            <a:pPr algn="l">
-              <a:lnSpc>
-                <a:spcPct val="104000"/>
-              </a:lnSpc>
-              <a:spcAft>
-                <a:spcPts val="0"/>
-              </a:spcAft>
-            </a:pPr>
-            <a:r>
-              <a:rPr sz="900" b="0" i="0">
-                <a:solidFill>
-                  <a:srgbClr val="141B2E"/>
-                </a:solidFill>
-                <a:latin typeface="Arial"/>
-              </a:rPr>
-              <a:t>≈ 4 мин</a:t>
+              <a:t>Множитель — число правок за задачу, а не стоимость одного прогона.</a:t>
             </a:r>
           </a:p>
         </p:txBody>
@@ -23275,605 +22738,6 @@
       <p:sp>
         <p:nvSpPr>
           <p:cNvPr id="42" name="TextBox 41"/>
-          <p:cNvSpPr txBox="1"/>
-          <p:nvPr/>
-        </p:nvSpPr>
-        <p:spPr>
-          <a:xfrm>
-            <a:off x="6374570" y="6116399"/>
-            <a:ext cx="2372592" cy="237744"/>
-          </a:xfrm>
-          <a:prstGeom prst="rect">
-            <a:avLst/>
-          </a:prstGeom>
-          <a:noFill/>
-        </p:spPr>
-        <p:txBody>
-          <a:bodyPr wrap="square" lIns="0" rIns="0" tIns="0" bIns="0" anchor="ctr">
-            <a:spAutoFit/>
-          </a:bodyPr>
-          <a:lstStyle/>
-          <a:p>
-            <a:pPr algn="l">
-              <a:lnSpc>
-                <a:spcPct val="104000"/>
-              </a:lnSpc>
-              <a:spcAft>
-                <a:spcPts val="0"/>
-              </a:spcAft>
-            </a:pPr>
-            <a:r>
-              <a:rPr sz="900" b="0" i="0">
-                <a:solidFill>
-                  <a:srgbClr val="141B2E"/>
-                </a:solidFill>
-                <a:latin typeface="Arial"/>
-              </a:rPr>
-              <a:t>≈ 8,5 мин</a:t>
-            </a:r>
-          </a:p>
-        </p:txBody>
-      </p:sp>
-      <p:sp>
-        <p:nvSpPr>
-          <p:cNvPr id="43" name="TextBox 42"/>
-          <p:cNvSpPr txBox="1"/>
-          <p:nvPr/>
-        </p:nvSpPr>
-        <p:spPr>
-          <a:xfrm>
-            <a:off x="8893466" y="6116399"/>
-            <a:ext cx="2518245" cy="237744"/>
-          </a:xfrm>
-          <a:prstGeom prst="rect">
-            <a:avLst/>
-          </a:prstGeom>
-          <a:noFill/>
-        </p:spPr>
-        <p:txBody>
-          <a:bodyPr wrap="square" lIns="0" rIns="0" tIns="0" bIns="0" anchor="ctr">
-            <a:spAutoFit/>
-          </a:bodyPr>
-          <a:lstStyle/>
-          <a:p>
-            <a:pPr algn="l">
-              <a:lnSpc>
-                <a:spcPct val="104000"/>
-              </a:lnSpc>
-              <a:spcAft>
-                <a:spcPts val="0"/>
-              </a:spcAft>
-            </a:pPr>
-            <a:r>
-              <a:rPr sz="900" b="0" i="0">
-                <a:solidFill>
-                  <a:srgbClr val="141B2E"/>
-                </a:solidFill>
-                <a:latin typeface="Arial"/>
-              </a:rPr>
-              <a:t>арифметика</a:t>
-            </a:r>
-          </a:p>
-        </p:txBody>
-      </p:sp>
-      <p:cxnSp>
-        <p:nvCxnSpPr>
-          <p:cNvPr id="44" name="Connector 43"/>
-          <p:cNvCxnSpPr/>
-          <p:nvPr/>
-        </p:nvCxnSpPr>
-        <p:spPr>
-          <a:xfrm>
-            <a:off x="630936" y="6354143"/>
-            <a:ext cx="10927080" cy="0"/>
-          </a:xfrm>
-          <a:prstGeom prst="line">
-            <a:avLst/>
-          </a:prstGeom>
-          <a:ln w="9525">
-            <a:solidFill>
-              <a:srgbClr val="E5EAF0"/>
-            </a:solidFill>
-          </a:ln>
-        </p:spPr>
-        <p:style>
-          <a:lnRef idx="2">
-            <a:schemeClr val="accent1"/>
-          </a:lnRef>
-          <a:fillRef idx="0">
-            <a:schemeClr val="accent1"/>
-          </a:fillRef>
-          <a:effectRef idx="1">
-            <a:schemeClr val="accent1"/>
-          </a:effectRef>
-          <a:fontRef idx="minor">
-            <a:schemeClr val="tx1"/>
-          </a:fontRef>
-        </p:style>
-      </p:cxnSp>
-      <p:sp>
-        <p:nvSpPr>
-          <p:cNvPr id="45" name="TextBox 44"/>
-          <p:cNvSpPr txBox="1"/>
-          <p:nvPr/>
-        </p:nvSpPr>
-        <p:spPr>
-          <a:xfrm>
-            <a:off x="630936" y="6354143"/>
-            <a:ext cx="3078434" cy="237744"/>
-          </a:xfrm>
-          <a:prstGeom prst="rect">
-            <a:avLst/>
-          </a:prstGeom>
-          <a:noFill/>
-        </p:spPr>
-        <p:txBody>
-          <a:bodyPr wrap="square" lIns="0" rIns="0" tIns="0" bIns="0" anchor="ctr">
-            <a:spAutoFit/>
-          </a:bodyPr>
-          <a:lstStyle/>
-          <a:p>
-            <a:pPr algn="l">
-              <a:lnSpc>
-                <a:spcPct val="104000"/>
-              </a:lnSpc>
-              <a:spcAft>
-                <a:spcPts val="0"/>
-              </a:spcAft>
-            </a:pPr>
-            <a:r>
-              <a:rPr sz="900" b="0" i="0">
-                <a:solidFill>
-                  <a:srgbClr val="141B2E"/>
-                </a:solidFill>
-                <a:latin typeface="Arial"/>
-              </a:rPr>
-              <a:t>прогон тестов 60 с</a:t>
-            </a:r>
-          </a:p>
-        </p:txBody>
-      </p:sp>
-      <p:sp>
-        <p:nvSpPr>
-          <p:cNvPr id="46" name="TextBox 45"/>
-          <p:cNvSpPr txBox="1"/>
-          <p:nvPr/>
-        </p:nvSpPr>
-        <p:spPr>
-          <a:xfrm>
-            <a:off x="3855674" y="6354143"/>
-            <a:ext cx="2372592" cy="237744"/>
-          </a:xfrm>
-          <a:prstGeom prst="rect">
-            <a:avLst/>
-          </a:prstGeom>
-          <a:noFill/>
-        </p:spPr>
-        <p:txBody>
-          <a:bodyPr wrap="square" lIns="0" rIns="0" tIns="0" bIns="0" anchor="ctr">
-            <a:spAutoFit/>
-          </a:bodyPr>
-          <a:lstStyle/>
-          <a:p>
-            <a:pPr algn="l">
-              <a:lnSpc>
-                <a:spcPct val="104000"/>
-              </a:lnSpc>
-              <a:spcAft>
-                <a:spcPts val="0"/>
-              </a:spcAft>
-            </a:pPr>
-            <a:r>
-              <a:rPr sz="900" b="0" i="0">
-                <a:solidFill>
-                  <a:srgbClr val="141B2E"/>
-                </a:solidFill>
-                <a:latin typeface="Arial"/>
-              </a:rPr>
-              <a:t>≈ 20 мин</a:t>
-            </a:r>
-          </a:p>
-        </p:txBody>
-      </p:sp>
-      <p:sp>
-        <p:nvSpPr>
-          <p:cNvPr id="47" name="TextBox 46"/>
-          <p:cNvSpPr txBox="1"/>
-          <p:nvPr/>
-        </p:nvSpPr>
-        <p:spPr>
-          <a:xfrm>
-            <a:off x="6374570" y="6354143"/>
-            <a:ext cx="2372592" cy="237744"/>
-          </a:xfrm>
-          <a:prstGeom prst="rect">
-            <a:avLst/>
-          </a:prstGeom>
-          <a:noFill/>
-        </p:spPr>
-        <p:txBody>
-          <a:bodyPr wrap="square" lIns="0" rIns="0" tIns="0" bIns="0" anchor="ctr">
-            <a:spAutoFit/>
-          </a:bodyPr>
-          <a:lstStyle/>
-          <a:p>
-            <a:pPr algn="l">
-              <a:lnSpc>
-                <a:spcPct val="104000"/>
-              </a:lnSpc>
-              <a:spcAft>
-                <a:spcPts val="0"/>
-              </a:spcAft>
-            </a:pPr>
-            <a:r>
-              <a:rPr sz="900" b="0" i="0">
-                <a:solidFill>
-                  <a:srgbClr val="141B2E"/>
-                </a:solidFill>
-                <a:latin typeface="Arial"/>
-              </a:rPr>
-              <a:t>≈ 40 мин</a:t>
-            </a:r>
-          </a:p>
-        </p:txBody>
-      </p:sp>
-      <p:sp>
-        <p:nvSpPr>
-          <p:cNvPr id="48" name="TextBox 47"/>
-          <p:cNvSpPr txBox="1"/>
-          <p:nvPr/>
-        </p:nvSpPr>
-        <p:spPr>
-          <a:xfrm>
-            <a:off x="8893466" y="6354143"/>
-            <a:ext cx="2518245" cy="237744"/>
-          </a:xfrm>
-          <a:prstGeom prst="rect">
-            <a:avLst/>
-          </a:prstGeom>
-          <a:noFill/>
-        </p:spPr>
-        <p:txBody>
-          <a:bodyPr wrap="square" lIns="0" rIns="0" tIns="0" bIns="0" anchor="ctr">
-            <a:spAutoFit/>
-          </a:bodyPr>
-          <a:lstStyle/>
-          <a:p>
-            <a:pPr algn="l">
-              <a:lnSpc>
-                <a:spcPct val="104000"/>
-              </a:lnSpc>
-              <a:spcAft>
-                <a:spcPts val="0"/>
-              </a:spcAft>
-            </a:pPr>
-            <a:r>
-              <a:rPr sz="900" b="0" i="0">
-                <a:solidFill>
-                  <a:srgbClr val="141B2E"/>
-                </a:solidFill>
-                <a:latin typeface="Arial"/>
-              </a:rPr>
-              <a:t>арифметика</a:t>
-            </a:r>
-          </a:p>
-        </p:txBody>
-      </p:sp>
-      <p:cxnSp>
-        <p:nvCxnSpPr>
-          <p:cNvPr id="49" name="Connector 48"/>
-          <p:cNvCxnSpPr/>
-          <p:nvPr/>
-        </p:nvCxnSpPr>
-        <p:spPr>
-          <a:xfrm>
-            <a:off x="630936" y="6591887"/>
-            <a:ext cx="10927080" cy="0"/>
-          </a:xfrm>
-          <a:prstGeom prst="line">
-            <a:avLst/>
-          </a:prstGeom>
-          <a:ln w="9525">
-            <a:solidFill>
-              <a:srgbClr val="E5EAF0"/>
-            </a:solidFill>
-          </a:ln>
-        </p:spPr>
-        <p:style>
-          <a:lnRef idx="2">
-            <a:schemeClr val="accent1"/>
-          </a:lnRef>
-          <a:fillRef idx="0">
-            <a:schemeClr val="accent1"/>
-          </a:fillRef>
-          <a:effectRef idx="1">
-            <a:schemeClr val="accent1"/>
-          </a:effectRef>
-          <a:fontRef idx="minor">
-            <a:schemeClr val="tx1"/>
-          </a:fontRef>
-        </p:style>
-      </p:cxnSp>
-      <p:sp>
-        <p:nvSpPr>
-          <p:cNvPr id="50" name="TextBox 49"/>
-          <p:cNvSpPr txBox="1"/>
-          <p:nvPr/>
-        </p:nvSpPr>
-        <p:spPr>
-          <a:xfrm>
-            <a:off x="630936" y="6591887"/>
-            <a:ext cx="3078434" cy="237744"/>
-          </a:xfrm>
-          <a:prstGeom prst="rect">
-            <a:avLst/>
-          </a:prstGeom>
-          <a:noFill/>
-        </p:spPr>
-        <p:txBody>
-          <a:bodyPr wrap="square" lIns="0" rIns="0" tIns="0" bIns="0" anchor="ctr">
-            <a:spAutoFit/>
-          </a:bodyPr>
-          <a:lstStyle/>
-          <a:p>
-            <a:pPr algn="l">
-              <a:lnSpc>
-                <a:spcPct val="104000"/>
-              </a:lnSpc>
-              <a:spcAft>
-                <a:spcPts val="0"/>
-              </a:spcAft>
-            </a:pPr>
-            <a:r>
-              <a:rPr sz="900" b="0" i="0">
-                <a:solidFill>
-                  <a:srgbClr val="141B2E"/>
-                </a:solidFill>
-                <a:latin typeface="Arial"/>
-              </a:rPr>
-              <a:t>то же, и хуков </a:t>
-            </a:r>
-            <a:r>
-              <a:rPr sz="900" b="1" i="0">
-                <a:solidFill>
-                  <a:srgbClr val="141B2E"/>
-                </a:solidFill>
-                <a:latin typeface="Arial"/>
-              </a:rPr>
-              <a:t>два</a:t>
-            </a:r>
-          </a:p>
-        </p:txBody>
-      </p:sp>
-      <p:sp>
-        <p:nvSpPr>
-          <p:cNvPr id="51" name="TextBox 50"/>
-          <p:cNvSpPr txBox="1"/>
-          <p:nvPr/>
-        </p:nvSpPr>
-        <p:spPr>
-          <a:xfrm>
-            <a:off x="3855674" y="6591887"/>
-            <a:ext cx="2372592" cy="237744"/>
-          </a:xfrm>
-          <a:prstGeom prst="rect">
-            <a:avLst/>
-          </a:prstGeom>
-          <a:noFill/>
-        </p:spPr>
-        <p:txBody>
-          <a:bodyPr wrap="square" lIns="0" rIns="0" tIns="0" bIns="0" anchor="ctr">
-            <a:spAutoFit/>
-          </a:bodyPr>
-          <a:lstStyle/>
-          <a:p>
-            <a:pPr algn="l">
-              <a:lnSpc>
-                <a:spcPct val="104000"/>
-              </a:lnSpc>
-              <a:spcAft>
-                <a:spcPts val="0"/>
-              </a:spcAft>
-            </a:pPr>
-            <a:r>
-              <a:rPr sz="900" b="0" i="0">
-                <a:solidFill>
-                  <a:srgbClr val="141B2E"/>
-                </a:solidFill>
-                <a:latin typeface="Arial"/>
-              </a:rPr>
-              <a:t>≈ 40 мин</a:t>
-            </a:r>
-          </a:p>
-        </p:txBody>
-      </p:sp>
-      <p:sp>
-        <p:nvSpPr>
-          <p:cNvPr id="52" name="TextBox 51"/>
-          <p:cNvSpPr txBox="1"/>
-          <p:nvPr/>
-        </p:nvSpPr>
-        <p:spPr>
-          <a:xfrm>
-            <a:off x="6374570" y="6591887"/>
-            <a:ext cx="2372592" cy="237744"/>
-          </a:xfrm>
-          <a:prstGeom prst="rect">
-            <a:avLst/>
-          </a:prstGeom>
-          <a:noFill/>
-        </p:spPr>
-        <p:txBody>
-          <a:bodyPr wrap="square" lIns="0" rIns="0" tIns="0" bIns="0" anchor="ctr">
-            <a:spAutoFit/>
-          </a:bodyPr>
-          <a:lstStyle/>
-          <a:p>
-            <a:pPr algn="l">
-              <a:lnSpc>
-                <a:spcPct val="104000"/>
-              </a:lnSpc>
-              <a:spcAft>
-                <a:spcPts val="0"/>
-              </a:spcAft>
-            </a:pPr>
-            <a:r>
-              <a:rPr sz="900" b="0" i="0">
-                <a:solidFill>
-                  <a:srgbClr val="141B2E"/>
-                </a:solidFill>
-                <a:latin typeface="Arial"/>
-              </a:rPr>
-              <a:t>≈ </a:t>
-            </a:r>
-            <a:r>
-              <a:rPr sz="900" b="1" i="0">
-                <a:solidFill>
-                  <a:srgbClr val="141B2E"/>
-                </a:solidFill>
-                <a:latin typeface="Arial"/>
-              </a:rPr>
-              <a:t>80 мин</a:t>
-            </a:r>
-          </a:p>
-        </p:txBody>
-      </p:sp>
-      <p:sp>
-        <p:nvSpPr>
-          <p:cNvPr id="53" name="TextBox 52"/>
-          <p:cNvSpPr txBox="1"/>
-          <p:nvPr/>
-        </p:nvSpPr>
-        <p:spPr>
-          <a:xfrm>
-            <a:off x="8893466" y="6591887"/>
-            <a:ext cx="2518245" cy="237744"/>
-          </a:xfrm>
-          <a:prstGeom prst="rect">
-            <a:avLst/>
-          </a:prstGeom>
-          <a:noFill/>
-        </p:spPr>
-        <p:txBody>
-          <a:bodyPr wrap="square" lIns="0" rIns="0" tIns="0" bIns="0" anchor="ctr">
-            <a:spAutoFit/>
-          </a:bodyPr>
-          <a:lstStyle/>
-          <a:p>
-            <a:pPr algn="l">
-              <a:lnSpc>
-                <a:spcPct val="104000"/>
-              </a:lnSpc>
-              <a:spcAft>
-                <a:spcPts val="0"/>
-              </a:spcAft>
-            </a:pPr>
-            <a:r>
-              <a:rPr sz="900" b="0" i="0">
-                <a:solidFill>
-                  <a:srgbClr val="141B2E"/>
-                </a:solidFill>
-                <a:latin typeface="Arial"/>
-              </a:rPr>
-              <a:t>арифметика</a:t>
-            </a:r>
-          </a:p>
-        </p:txBody>
-      </p:sp>
-      <p:sp>
-        <p:nvSpPr>
-          <p:cNvPr id="54" name="Rounded Rectangle 53"/>
-          <p:cNvSpPr/>
-          <p:nvPr/>
-        </p:nvSpPr>
-        <p:spPr>
-          <a:xfrm>
-            <a:off x="502920" y="7122239"/>
-            <a:ext cx="11183112" cy="454152"/>
-          </a:xfrm>
-          <a:prstGeom prst="roundRect">
-            <a:avLst>
-              <a:gd name="adj" fmla="val 25000"/>
-            </a:avLst>
-          </a:prstGeom>
-          <a:solidFill>
-            <a:srgbClr val="E4E9EF"/>
-          </a:solidFill>
-          <a:ln w="15240">
-            <a:solidFill>
-              <a:srgbClr val="6B7685"/>
-            </a:solidFill>
-            <a:prstDash val="dash"/>
-          </a:ln>
-          <a:effectLst/>
-        </p:spPr>
-        <p:style>
-          <a:lnRef idx="1">
-            <a:schemeClr val="accent1"/>
-          </a:lnRef>
-          <a:fillRef idx="3">
-            <a:schemeClr val="accent1"/>
-          </a:fillRef>
-          <a:effectRef idx="2">
-            <a:schemeClr val="accent1"/>
-          </a:effectRef>
-          <a:fontRef idx="minor">
-            <a:schemeClr val="lt1"/>
-          </a:fontRef>
-        </p:style>
-        <p:txBody>
-          <a:bodyPr rtlCol="0" anchor="ctr"/>
-          <a:lstStyle/>
-          <a:p>
-            <a:pPr algn="ctr"/>
-          </a:p>
-        </p:txBody>
-      </p:sp>
-      <p:sp>
-        <p:nvSpPr>
-          <p:cNvPr id="55" name="TextBox 54"/>
-          <p:cNvSpPr txBox="1"/>
-          <p:nvPr/>
-        </p:nvSpPr>
-        <p:spPr>
-          <a:xfrm>
-            <a:off x="740664" y="7259399"/>
-            <a:ext cx="10707624" cy="179832"/>
-          </a:xfrm>
-          <a:prstGeom prst="rect">
-            <a:avLst/>
-          </a:prstGeom>
-          <a:noFill/>
-        </p:spPr>
-        <p:txBody>
-          <a:bodyPr wrap="square" lIns="0" rIns="0" tIns="0" bIns="0" anchor="ctr">
-            <a:spAutoFit/>
-          </a:bodyPr>
-          <a:lstStyle/>
-          <a:p>
-            <a:pPr algn="l">
-              <a:lnSpc>
-                <a:spcPct val="118000"/>
-              </a:lnSpc>
-              <a:spcAft>
-                <a:spcPts val="300"/>
-              </a:spcAft>
-            </a:pPr>
-            <a:r>
-              <a:rPr sz="1200" b="1" i="1">
-                <a:solidFill>
-                  <a:srgbClr val="6B7685"/>
-                </a:solidFill>
-                <a:latin typeface="Arial"/>
-              </a:rPr>
-              <a:t>Множитель — число правок за задачу, а не стоимость одного прогона.</a:t>
-            </a:r>
-          </a:p>
-        </p:txBody>
-      </p:sp>
-      <p:sp>
-        <p:nvSpPr>
-          <p:cNvPr id="56" name="TextBox 55"/>
           <p:cNvSpPr txBox="1"/>
           <p:nvPr/>
         </p:nvSpPr>
@@ -28406,8 +27270,8 @@
         </p:nvSpPr>
         <p:spPr>
           <a:xfrm>
-            <a:off x="502920" y="1254252"/>
-            <a:ext cx="11183112" cy="1167892"/>
+            <a:off x="502920" y="1303019"/>
+            <a:ext cx="11183112" cy="1197864"/>
           </a:xfrm>
           <a:prstGeom prst="roundRect">
             <a:avLst>
@@ -28454,8 +27318,8 @@
         </p:nvSpPr>
         <p:spPr>
           <a:xfrm>
-            <a:off x="521208" y="1309116"/>
-            <a:ext cx="64008" cy="1058164"/>
+            <a:off x="521208" y="1357884"/>
+            <a:ext cx="64008" cy="1088136"/>
           </a:xfrm>
           <a:prstGeom prst="roundRect">
             <a:avLst>
@@ -28500,8 +27364,8 @@
         </p:nvSpPr>
         <p:spPr>
           <a:xfrm>
-            <a:off x="804672" y="1391411"/>
-            <a:ext cx="10643616" cy="893572"/>
+            <a:off x="804672" y="1440179"/>
+            <a:ext cx="10643616" cy="923544"/>
           </a:xfrm>
           <a:prstGeom prst="rect">
             <a:avLst/>
@@ -28523,7 +27387,7 @@
               </a:spcAft>
             </a:pPr>
             <a:r>
-              <a:rPr sz="1300" b="0" i="0">
+              <a:rPr sz="1350" b="0" i="0">
                 <a:solidFill>
                   <a:srgbClr val="141B2E"/>
                 </a:solidFill>
@@ -28532,7 +27396,7 @@
               <a:t>В файле инструкций </a:t>
             </a:r>
             <a:r>
-              <a:rPr sz="1300" b="1" i="0">
+              <a:rPr sz="1350" b="1" i="0">
                 <a:solidFill>
                   <a:srgbClr val="141B2E"/>
                 </a:solidFill>
@@ -28541,7 +27405,7 @@
               <a:t>этого курса</a:t>
             </a:r>
             <a:r>
-              <a:rPr sz="1300" b="0" i="0">
+              <a:rPr sz="1350" b="0" i="0">
                 <a:solidFill>
                   <a:srgbClr val="141B2E"/>
                 </a:solidFill>
@@ -28560,7 +27424,7 @@
               </a:spcAft>
             </a:pPr>
             <a:r>
-              <a:rPr sz="1300" b="1" i="0">
+              <a:rPr sz="1350" b="1" i="0">
                 <a:solidFill>
                   <a:srgbClr val="141B2E"/>
                 </a:solidFill>
@@ -28569,7 +27433,7 @@
               <a:t>«NEVER push to main directly … This is NON-NEGOTIABLE, even for "small" fixes»</a:t>
             </a:r>
             <a:r>
-              <a:rPr sz="1300" b="0" i="0">
+              <a:rPr sz="1350" b="0" i="0">
                 <a:solidFill>
                   <a:srgbClr val="141B2E"/>
                 </a:solidFill>
@@ -28588,7 +27452,7 @@
               </a:spcAft>
             </a:pPr>
             <a:r>
-              <a:rPr sz="1300" b="0" i="0">
+              <a:rPr sz="1350" b="0" i="0">
                 <a:solidFill>
                   <a:srgbClr val="141B2E"/>
                 </a:solidFill>
@@ -28607,7 +27471,7 @@
               </a:spcAft>
             </a:pPr>
             <a:r>
-              <a:rPr sz="1300" b="0" i="0">
+              <a:rPr sz="1350" b="0" i="0">
                 <a:solidFill>
                   <a:srgbClr val="141B2E"/>
                 </a:solidFill>
@@ -28616,7 +27480,7 @@
               <a:t>А файл настроек рядом — </a:t>
             </a:r>
             <a:r>
-              <a:rPr sz="1300" b="0" i="0">
+              <a:rPr sz="1350" b="0" i="0">
                 <a:solidFill>
                   <a:srgbClr val="141B2E"/>
                 </a:solidFill>
@@ -28625,7 +27489,7 @@
               <a:t>.claude/settings.json</a:t>
             </a:r>
             <a:r>
-              <a:rPr sz="1300" b="0" i="0">
+              <a:rPr sz="1350" b="0" i="0">
                 <a:solidFill>
                   <a:srgbClr val="141B2E"/>
                 </a:solidFill>
@@ -28634,7 +27498,7 @@
               <a:t> — содержит </a:t>
             </a:r>
             <a:r>
-              <a:rPr sz="1300" b="0" i="0">
+              <a:rPr sz="1350" b="0" i="0">
                 <a:solidFill>
                   <a:srgbClr val="141B2E"/>
                 </a:solidFill>
@@ -28643,7 +27507,7 @@
               <a:t>{}</a:t>
             </a:r>
             <a:r>
-              <a:rPr sz="1300" b="0" i="0">
+              <a:rPr sz="1350" b="0" i="0">
                 <a:solidFill>
                   <a:srgbClr val="141B2E"/>
                 </a:solidFill>
@@ -28662,8 +27526,8 @@
         </p:nvSpPr>
         <p:spPr>
           <a:xfrm>
-            <a:off x="502920" y="2623312"/>
-            <a:ext cx="32004" cy="509778"/>
+            <a:off x="502920" y="2823971"/>
+            <a:ext cx="32004" cy="525780"/>
           </a:xfrm>
           <a:prstGeom prst="rect">
             <a:avLst/>
@@ -28706,8 +27570,8 @@
         </p:nvSpPr>
         <p:spPr>
           <a:xfrm>
-            <a:off x="772668" y="2678176"/>
-            <a:ext cx="10730484" cy="400049"/>
+            <a:off x="772668" y="2878835"/>
+            <a:ext cx="10730484" cy="416052"/>
           </a:xfrm>
           <a:prstGeom prst="rect">
             <a:avLst/>
@@ -28729,7 +27593,7 @@
               </a:spcAft>
             </a:pPr>
             <a:r>
-              <a:rPr sz="1250" b="0" i="1">
+              <a:rPr sz="1300" b="0" i="1">
                 <a:solidFill>
                   <a:srgbClr val="6B7685"/>
                 </a:solidFill>
@@ -28748,8 +27612,8 @@
         </p:nvSpPr>
         <p:spPr>
           <a:xfrm>
-            <a:off x="502920" y="3334258"/>
-            <a:ext cx="11183112" cy="809220"/>
+            <a:off x="502920" y="3672839"/>
+            <a:ext cx="11183112" cy="822960"/>
           </a:xfrm>
           <a:prstGeom prst="roundRect">
             <a:avLst>
@@ -28796,8 +27660,8 @@
         </p:nvSpPr>
         <p:spPr>
           <a:xfrm>
-            <a:off x="722376" y="3462274"/>
-            <a:ext cx="10744200" cy="553188"/>
+            <a:off x="722376" y="3800855"/>
+            <a:ext cx="10744200" cy="566928"/>
           </a:xfrm>
           <a:prstGeom prst="rect">
             <a:avLst/>
@@ -28838,7 +27702,7 @@
         </p:nvSpPr>
         <p:spPr>
           <a:xfrm>
-            <a:off x="502920" y="4308070"/>
+            <a:off x="502920" y="4782311"/>
             <a:ext cx="2119579" cy="1051560"/>
           </a:xfrm>
           <a:prstGeom prst="roundRect">
@@ -28886,7 +27750,7 @@
         </p:nvSpPr>
         <p:spPr>
           <a:xfrm>
-            <a:off x="612648" y="4308070"/>
+            <a:off x="612648" y="4782311"/>
             <a:ext cx="1900123" cy="1051560"/>
           </a:xfrm>
           <a:prstGeom prst="rect">
@@ -28928,7 +27792,7 @@
         </p:nvSpPr>
         <p:spPr>
           <a:xfrm>
-            <a:off x="2768803" y="4308070"/>
+            <a:off x="2768803" y="4782311"/>
             <a:ext cx="2119579" cy="1051560"/>
           </a:xfrm>
           <a:prstGeom prst="roundRect">
@@ -28976,7 +27840,7 @@
         </p:nvSpPr>
         <p:spPr>
           <a:xfrm>
-            <a:off x="2878531" y="4308070"/>
+            <a:off x="2878531" y="4782311"/>
             <a:ext cx="1900123" cy="1051560"/>
           </a:xfrm>
           <a:prstGeom prst="rect">
@@ -29018,7 +27882,7 @@
         </p:nvSpPr>
         <p:spPr>
           <a:xfrm>
-            <a:off x="5034686" y="4308070"/>
+            <a:off x="5034686" y="4782311"/>
             <a:ext cx="2119579" cy="1051560"/>
           </a:xfrm>
           <a:prstGeom prst="roundRect">
@@ -29066,7 +27930,7 @@
         </p:nvSpPr>
         <p:spPr>
           <a:xfrm>
-            <a:off x="5144414" y="4308070"/>
+            <a:off x="5144414" y="4782311"/>
             <a:ext cx="1900123" cy="1051560"/>
           </a:xfrm>
           <a:prstGeom prst="rect">
@@ -29108,7 +27972,7 @@
         </p:nvSpPr>
         <p:spPr>
           <a:xfrm>
-            <a:off x="7300569" y="4308070"/>
+            <a:off x="7300569" y="4782311"/>
             <a:ext cx="2119579" cy="1051560"/>
           </a:xfrm>
           <a:prstGeom prst="roundRect">
@@ -29156,7 +28020,7 @@
         </p:nvSpPr>
         <p:spPr>
           <a:xfrm>
-            <a:off x="7410297" y="4308070"/>
+            <a:off x="7410297" y="4782311"/>
             <a:ext cx="1900123" cy="1051560"/>
           </a:xfrm>
           <a:prstGeom prst="rect">
@@ -29198,7 +28062,7 @@
         </p:nvSpPr>
         <p:spPr>
           <a:xfrm>
-            <a:off x="9566452" y="4308070"/>
+            <a:off x="9566452" y="4782311"/>
             <a:ext cx="2119579" cy="1051560"/>
           </a:xfrm>
           <a:prstGeom prst="roundRect">
@@ -29246,7 +28110,7 @@
         </p:nvSpPr>
         <p:spPr>
           <a:xfrm>
-            <a:off x="9676180" y="4308070"/>
+            <a:off x="9676180" y="4782311"/>
             <a:ext cx="1900123" cy="1051560"/>
           </a:xfrm>
           <a:prstGeom prst="rect">
@@ -29282,93 +28146,7 @@
       </p:sp>
       <p:sp>
         <p:nvSpPr>
-          <p:cNvPr id="21" name="Rectangle 20"/>
-          <p:cNvSpPr/>
-          <p:nvPr/>
-        </p:nvSpPr>
-        <p:spPr>
-          <a:xfrm>
-            <a:off x="502920" y="5560798"/>
-            <a:ext cx="32004" cy="317754"/>
-          </a:xfrm>
-          <a:prstGeom prst="rect">
-            <a:avLst/>
-          </a:prstGeom>
-          <a:solidFill>
-            <a:srgbClr val="028090"/>
-          </a:solidFill>
-          <a:ln>
-            <a:noFill/>
-          </a:ln>
-          <a:effectLst/>
-        </p:spPr>
-        <p:style>
-          <a:lnRef idx="1">
-            <a:schemeClr val="accent1"/>
-          </a:lnRef>
-          <a:fillRef idx="3">
-            <a:schemeClr val="accent1"/>
-          </a:fillRef>
-          <a:effectRef idx="2">
-            <a:schemeClr val="accent1"/>
-          </a:effectRef>
-          <a:fontRef idx="minor">
-            <a:schemeClr val="lt1"/>
-          </a:fontRef>
-        </p:style>
-        <p:txBody>
-          <a:bodyPr rtlCol="0" anchor="ctr"/>
-          <a:lstStyle/>
-          <a:p>
-            <a:pPr algn="ctr"/>
-          </a:p>
-        </p:txBody>
-      </p:sp>
-      <p:sp>
-        <p:nvSpPr>
-          <p:cNvPr id="22" name="TextBox 21"/>
-          <p:cNvSpPr txBox="1"/>
-          <p:nvPr/>
-        </p:nvSpPr>
-        <p:spPr>
-          <a:xfrm>
-            <a:off x="772668" y="5615662"/>
-            <a:ext cx="10730484" cy="208025"/>
-          </a:xfrm>
-          <a:prstGeom prst="rect">
-            <a:avLst/>
-          </a:prstGeom>
-          <a:noFill/>
-        </p:spPr>
-        <p:txBody>
-          <a:bodyPr wrap="square" lIns="0" rIns="0" tIns="0" bIns="0" anchor="ctr">
-            <a:spAutoFit/>
-          </a:bodyPr>
-          <a:lstStyle/>
-          <a:p>
-            <a:pPr algn="l">
-              <a:lnSpc>
-                <a:spcPct val="126000"/>
-              </a:lnSpc>
-              <a:spcAft>
-                <a:spcPts val="300"/>
-              </a:spcAft>
-            </a:pPr>
-            <a:r>
-              <a:rPr sz="1300" b="0" i="1">
-                <a:solidFill>
-                  <a:srgbClr val="6B7685"/>
-                </a:solidFill>
-                <a:latin typeface="Arial"/>
-              </a:rPr>
-              <a:t>разбор — на следующем слайде</a:t>
-            </a:r>
-          </a:p>
-        </p:txBody>
-      </p:sp>
-      <p:sp>
-        <p:nvSpPr>
-          <p:cNvPr id="23" name="TextBox 22"/>
+          <p:cNvPr id="21" name="TextBox 20"/>
           <p:cNvSpPr txBox="1"/>
           <p:nvPr/>
         </p:nvSpPr>
@@ -29410,7 +28188,7 @@
       </p:sp>
       <p:sp>
         <p:nvSpPr>
-          <p:cNvPr id="24" name="TextBox 23"/>
+          <p:cNvPr id="22" name="TextBox 21"/>
           <p:cNvSpPr txBox="1"/>
           <p:nvPr/>
         </p:nvSpPr>
@@ -32087,8 +30865,8 @@
         </p:blipFill>
         <p:spPr>
           <a:xfrm>
-            <a:off x="2379026" y="1254252"/>
-            <a:ext cx="7430899" cy="1733876"/>
+            <a:off x="2109616" y="1254252"/>
+            <a:ext cx="7969719" cy="1527529"/>
           </a:xfrm>
           <a:prstGeom prst="rect">
             <a:avLst/>
@@ -32103,12 +30881,12 @@
         </p:nvSpPr>
         <p:spPr>
           <a:xfrm>
-            <a:off x="502920" y="3152720"/>
-            <a:ext cx="11183112" cy="1300930"/>
+            <a:off x="502920" y="2946373"/>
+            <a:ext cx="11183112" cy="1395262"/>
           </a:xfrm>
           <a:prstGeom prst="roundRect">
             <a:avLst>
-              <a:gd name="adj" fmla="val 15619"/>
+              <a:gd name="adj" fmla="val 14563"/>
             </a:avLst>
           </a:prstGeom>
           <a:solidFill>
@@ -32151,8 +30929,8 @@
         </p:nvSpPr>
         <p:spPr>
           <a:xfrm>
-            <a:off x="722376" y="3335600"/>
-            <a:ext cx="10744200" cy="935170"/>
+            <a:off x="722376" y="3129253"/>
+            <a:ext cx="10744200" cy="1029502"/>
           </a:xfrm>
           <a:prstGeom prst="rect">
             <a:avLst/>
@@ -32326,12 +31104,12 @@
         </p:nvSpPr>
         <p:spPr>
           <a:xfrm>
-            <a:off x="502920" y="4618243"/>
-            <a:ext cx="11183112" cy="1048609"/>
+            <a:off x="502920" y="4506227"/>
+            <a:ext cx="11183112" cy="1124644"/>
           </a:xfrm>
           <a:prstGeom prst="roundRect">
             <a:avLst>
-              <a:gd name="adj" fmla="val 19378"/>
+              <a:gd name="adj" fmla="val 18067"/>
             </a:avLst>
           </a:prstGeom>
           <a:solidFill>
@@ -32374,8 +31152,8 @@
         </p:nvSpPr>
         <p:spPr>
           <a:xfrm>
-            <a:off x="722376" y="4801123"/>
-            <a:ext cx="10744200" cy="682849"/>
+            <a:off x="722376" y="4689107"/>
+            <a:ext cx="10744200" cy="758884"/>
           </a:xfrm>
           <a:prstGeom prst="rect">
             <a:avLst/>
@@ -32511,8 +31289,8 @@
         </p:nvSpPr>
         <p:spPr>
           <a:xfrm>
-            <a:off x="502920" y="5831444"/>
-            <a:ext cx="82296" cy="496203"/>
+            <a:off x="502920" y="5795464"/>
+            <a:ext cx="82296" cy="532183"/>
           </a:xfrm>
           <a:prstGeom prst="roundRect">
             <a:avLst>
@@ -32557,8 +31335,8 @@
         </p:nvSpPr>
         <p:spPr>
           <a:xfrm>
-            <a:off x="859536" y="5959460"/>
-            <a:ext cx="10643616" cy="240171"/>
+            <a:off x="859536" y="5923480"/>
+            <a:ext cx="10643616" cy="276151"/>
           </a:xfrm>
           <a:prstGeom prst="rect">
             <a:avLst/>
@@ -32595,7 +31373,7 @@
                 </a:solidFill>
                 <a:latin typeface="Arial"/>
               </a:rPr>
-              <a:t> — четыре шага: достать команду из нагрузки (</a:t>
+              <a:t> — четыре шага: достать команду (</a:t>
             </a:r>
             <a:r>
               <a:rPr sz="1100" b="1" i="0">
@@ -32649,7 +31427,7 @@
                 </a:solidFill>
                 <a:latin typeface="Arial"/>
               </a:rPr>
-              <a:t>) → напечатать решение в виде JSON.</a:t>
+              <a:t>) → напечатать решение.</a:t>
             </a:r>
           </a:p>
         </p:txBody>
@@ -34606,7 +33384,7 @@
                 </a:solidFill>
                 <a:latin typeface="Arial"/>
               </a:rPr>
-              <a:t>На пустом репозитории без единого коммита: </a:t>
+              <a:t>На пустом репозитории без коммитов: </a:t>
             </a:r>
             <a:r>
               <a:rPr sz="1100" b="1" i="0">
@@ -34642,7 +33420,7 @@
                 </a:solidFill>
                 <a:latin typeface="Arial"/>
               </a:rPr>
-              <a:t>, ветку не вернул. </a:t>
+              <a:t>. </a:t>
             </a:r>
             <a:r>
               <a:rPr sz="1100" b="1" i="0">
@@ -34678,7 +33456,7 @@
                 </a:solidFill>
                 <a:latin typeface="Arial"/>
               </a:rPr>
-              <a:t>. Тот же репозиторий, обе команды подряд.</a:t>
+              <a:t>. Тот же репозиторий, обе подряд.</a:t>
             </a:r>
           </a:p>
         </p:txBody>
